--- a/data/2026-09-11/slides.pptx
+++ b/data/2026-09-11/slides.pptx
@@ -513,12 +513,12 @@
           </a:p>
           <a:p>
             <a:r>
-              <a:t>대본: 오늘 새로 나온 탈모 연구, 이거 안 보면 손해입니다.</a:t>
-            </a:r>
-          </a:p>
-          <a:p>
-            <a:r>
-              <a:t>연출 노트: 가장 임팩트 있는 한 줄. 시청 유지율의 핵심 구간.</a:t>
+              <a:t>대본: 85% 이 숫자, 탈모 연구가 새로 내놨습니다</a:t>
+            </a:r>
+          </a:p>
+          <a:p>
+            <a:r>
+              <a:t>연출 노트: 0.5초 안에 스크롤을 멈추게 하는 구간. 숫자를 크게 읽어준다.</a:t>
             </a:r>
           </a:p>
         </p:txBody>
@@ -588,17 +588,17 @@
           <a:lstStyle/>
           <a:p>
             <a:r>
-              <a:t>[paper_intro] 약 9초</a:t>
-            </a:r>
-          </a:p>
-          <a:p>
-            <a:r>
-              <a:t>대본: 《Veterinary journal (London, England : 1997)》 - Canine Flank Alopecia: A Narrative Review of Clinical Presentation, Genetic Basis, and Therapeutic Management</a:t>
-            </a:r>
-          </a:p>
-          <a:p>
-            <a:r>
-              <a:t>연출 노트: 오늘 다룰 논문/기사 표지 카드 노출 + 출처 소개</a:t>
+              <a:t>[paper_intro] 약 8초</a:t>
+            </a:r>
+          </a:p>
+          <a:p>
+            <a:r>
+              <a:t>대본: 《Clinical, cosmetic and investigational dermatology》 - Dupilumab Combined with Topical 5% Minoxidil for Severe Alopecia Areata in a 2-Year-Old Child with Type 2 Immune Features: A Case Report</a:t>
+            </a:r>
+          </a:p>
+          <a:p>
+            <a:r>
+              <a:t>연출 노트: 출처를 분명히 밝혀 신뢰를 준다.</a:t>
             </a:r>
           </a:p>
         </p:txBody>
@@ -668,17 +668,17 @@
           <a:lstStyle/>
           <a:p>
             <a:r>
-              <a:t>[key_finding_1] 약 12초</a:t>
-            </a:r>
-          </a:p>
-          <a:p>
-            <a:r>
-              <a:t>대본: Canine flank alopecia (CFA) is a seasonally recurrent skin disorder with a strong breed predisposition.</a:t>
-            </a:r>
-          </a:p>
-          <a:p>
-            <a:r>
-              <a:t>연출 노트: 핵심 포인트 1 - 주제 관련 이미지 배경 + 자막 오버레이</a:t>
+              <a:t>[key_finding_1] 약 10초</a:t>
+            </a:r>
+          </a:p>
+          <a:p>
+            <a:r>
+              <a:t>대본: Background: Severe alopecia areata (AA) in very young children is difficult to manage because evidence-based treatment options are limited and currently approved Janus kinase (JAK) inhibitor therapies do not cover children younger than 12 years.</a:t>
+            </a:r>
+          </a:p>
+          <a:p>
+            <a:r>
+              <a:t>연출 노트: 핵심 포인트 1. 자막을 끊어 읽는다.</a:t>
             </a:r>
           </a:p>
         </p:txBody>
@@ -748,17 +748,17 @@
           <a:lstStyle/>
           <a:p>
             <a:r>
-              <a:t>[key_finding_2] 약 12초</a:t>
-            </a:r>
-          </a:p>
-          <a:p>
-            <a:r>
-              <a:t>대본: Affected dogs display non-inflammatory, often hyperpigmented, well-circumscribed, symmetrical patches of hair loss, typically located on the thoracolumbar flanks.</a:t>
-            </a:r>
-          </a:p>
-          <a:p>
-            <a:r>
-              <a:t>연출 노트: 핵심 포인트 2 (없으면 이 씬 스킵)</a:t>
+              <a:t>[key_finding_2] 약 10초</a:t>
+            </a:r>
+          </a:p>
+          <a:p>
+            <a:r>
+              <a:t>대본: Case presentation: A 2-year-and-5-month-old girl with a 2-year history of progressive scalp hair loss presented with severe diffuse AA (Severity of Alopecia Tool [SALT] score, 85%).</a:t>
+            </a:r>
+          </a:p>
+          <a:p>
+            <a:r>
+              <a:t>연출 노트: 핵심 포인트 2.</a:t>
             </a:r>
           </a:p>
         </p:txBody>
@@ -828,17 +828,17 @@
           <a:lstStyle/>
           <a:p>
             <a:r>
-              <a:t>[my_take] 약 12초</a:t>
-            </a:r>
-          </a:p>
-          <a:p>
-            <a:r>
-              <a:t>대본: 본인 코멘트를 자유롭게 추가하세요.</a:t>
-            </a:r>
-          </a:p>
-          <a:p>
-            <a:r>
-              <a:t>연출 노트: 본인 사진 + 한마디 코멘트. assets/my-photo/latest.jpg 로 직접 교체.</a:t>
+              <a:t>[my_take] 약 10초</a:t>
+            </a:r>
+          </a:p>
+          <a:p>
+            <a:r>
+              <a:t>대본: 탈모 연구, 매일 쉽게 정리해드립니다 🙂</a:t>
+            </a:r>
+          </a:p>
+          <a:p>
+            <a:r>
+              <a:t>연출 노트: 본인 사진 + 코멘트. 문구를 직접 바꿔 쓰세요.</a:t>
             </a:r>
           </a:p>
         </p:txBody>
@@ -908,7 +908,7 @@
           <a:lstStyle/>
           <a:p>
             <a:r>
-              <a:t>[cta] 약 9초</a:t>
+              <a:t>[cta] 약 8초</a:t>
             </a:r>
           </a:p>
           <a:p>
@@ -918,7 +918,7 @@
           </a:p>
           <a:p>
             <a:r>
-              <a:t>연출 노트: 구독/팔로우 유도 + 원문 링크는 고정 댓글 안내</a:t>
+              <a:t>연출 노트: 원문 링크는 고정 댓글로 안내.</a:t>
             </a:r>
           </a:p>
         </p:txBody>
@@ -3917,6 +3917,180 @@
 <file path=ppt/slides/slide1.xml><?xml version="1.0" encoding="utf-8"?>
 <p:sld xmlns:a="http://schemas.openxmlformats.org/drawingml/2006/main" xmlns:p="http://schemas.openxmlformats.org/presentationml/2006/main" xmlns:r="http://schemas.openxmlformats.org/officeDocument/2006/relationships">
   <p:cSld>
+    <p:bg>
+      <p:bgPr>
+        <a:solidFill>
+          <a:srgbClr val="1B1F3B"/>
+        </a:solidFill>
+        <a:effectLst/>
+      </p:bgPr>
+    </p:bg>
+    <p:spTree>
+      <p:nvGrpSpPr>
+        <p:cNvPr id="1" name=""/>
+        <p:cNvGrpSpPr/>
+        <p:nvPr/>
+      </p:nvGrpSpPr>
+      <p:grpSpPr/>
+      <p:sp>
+        <p:nvSpPr>
+          <p:cNvPr id="2" name="TextBox 1"/>
+          <p:cNvSpPr txBox="1"/>
+          <p:nvPr/>
+        </p:nvSpPr>
+        <p:spPr>
+          <a:xfrm>
+            <a:off x="365760" y="1371600"/>
+            <a:ext cx="4828032" cy="457200"/>
+          </a:xfrm>
+          <a:prstGeom prst="rect">
+            <a:avLst/>
+          </a:prstGeom>
+          <a:noFill/>
+        </p:spPr>
+        <p:txBody>
+          <a:bodyPr wrap="square" anchor="ctr">
+            <a:spAutoFit/>
+          </a:bodyPr>
+          <a:lstStyle/>
+          <a:p>
+            <a:pPr algn="ctr"/>
+            <a:r>
+              <a:rPr sz="1400" b="1">
+                <a:solidFill>
+                  <a:srgbClr val="FF6B6B"/>
+                </a:solidFill>
+                <a:latin typeface="Arial"/>
+              </a:rPr>
+              <a:t>CLINICAL, COSMETIC AND INVESTIGATIONAL D</a:t>
+            </a:r>
+          </a:p>
+        </p:txBody>
+      </p:sp>
+      <p:sp>
+        <p:nvSpPr>
+          <p:cNvPr id="3" name="TextBox 2"/>
+          <p:cNvSpPr txBox="1"/>
+          <p:nvPr/>
+        </p:nvSpPr>
+        <p:spPr>
+          <a:xfrm>
+            <a:off x="274320" y="3108960"/>
+            <a:ext cx="5010912" cy="2011680"/>
+          </a:xfrm>
+          <a:prstGeom prst="rect">
+            <a:avLst/>
+          </a:prstGeom>
+          <a:noFill/>
+        </p:spPr>
+        <p:txBody>
+          <a:bodyPr wrap="square" anchor="ctr">
+            <a:spAutoFit/>
+          </a:bodyPr>
+          <a:lstStyle/>
+          <a:p>
+            <a:pPr algn="ctr"/>
+            <a:r>
+              <a:rPr sz="8000" b="1">
+                <a:solidFill>
+                  <a:srgbClr val="FF6B6B"/>
+                </a:solidFill>
+                <a:latin typeface="Arial"/>
+              </a:rPr>
+              <a:t>85%</a:t>
+            </a:r>
+          </a:p>
+        </p:txBody>
+      </p:sp>
+      <p:sp>
+        <p:nvSpPr>
+          <p:cNvPr id="4" name="TextBox 3"/>
+          <p:cNvSpPr txBox="1"/>
+          <p:nvPr/>
+        </p:nvSpPr>
+        <p:spPr>
+          <a:xfrm>
+            <a:off x="457200" y="5394960"/>
+            <a:ext cx="4645152" cy="1463040"/>
+          </a:xfrm>
+          <a:prstGeom prst="rect">
+            <a:avLst/>
+          </a:prstGeom>
+          <a:noFill/>
+        </p:spPr>
+        <p:txBody>
+          <a:bodyPr wrap="square" anchor="ctr">
+            <a:spAutoFit/>
+          </a:bodyPr>
+          <a:lstStyle/>
+          <a:p>
+            <a:pPr algn="ctr"/>
+            <a:r>
+              <a:rPr sz="2800" b="1">
+                <a:solidFill>
+                  <a:srgbClr val="FFFFFF"/>
+                </a:solidFill>
+                <a:latin typeface="Arial"/>
+              </a:rPr>
+              <a:t>이 숫자, 탈모 연구가 새로 내놨습니다</a:t>
+            </a:r>
+          </a:p>
+        </p:txBody>
+      </p:sp>
+      <p:sp>
+        <p:nvSpPr>
+          <p:cNvPr id="5" name="TextBox 4"/>
+          <p:cNvSpPr txBox="1"/>
+          <p:nvPr/>
+        </p:nvSpPr>
+        <p:spPr>
+          <a:xfrm>
+            <a:off x="365760" y="8778240"/>
+            <a:ext cx="4828032" cy="457200"/>
+          </a:xfrm>
+          <a:prstGeom prst="rect">
+            <a:avLst/>
+          </a:prstGeom>
+          <a:noFill/>
+        </p:spPr>
+        <p:txBody>
+          <a:bodyPr wrap="square" anchor="ctr">
+            <a:spAutoFit/>
+          </a:bodyPr>
+          <a:lstStyle/>
+          <a:p>
+            <a:pPr algn="ctr"/>
+            <a:r>
+              <a:rPr sz="1200" b="0">
+                <a:solidFill>
+                  <a:srgbClr val="AAAFCD"/>
+                </a:solidFill>
+                <a:latin typeface="Arial"/>
+              </a:rPr>
+              <a:t>2026  |  매일 아침 탈모 연구 한 편</a:t>
+            </a:r>
+          </a:p>
+        </p:txBody>
+      </p:sp>
+    </p:spTree>
+  </p:cSld>
+  <p:clrMapOvr>
+    <a:masterClrMapping/>
+  </p:clrMapOvr>
+</p:sld>
+</file>
+
+<file path=ppt/slides/slide2.xml><?xml version="1.0" encoding="utf-8"?>
+<p:sld xmlns:a="http://schemas.openxmlformats.org/drawingml/2006/main" xmlns:p="http://schemas.openxmlformats.org/presentationml/2006/main" xmlns:r="http://schemas.openxmlformats.org/officeDocument/2006/relationships">
+  <p:cSld>
+    <p:bg>
+      <p:bgPr>
+        <a:solidFill>
+          <a:srgbClr val="1B1F3B"/>
+        </a:solidFill>
+        <a:effectLst/>
+      </p:bgPr>
+    </p:bg>
     <p:spTree>
       <p:nvGrpSpPr>
         <p:cNvPr id="1" name=""/>
@@ -3926,7 +4100,7 @@
       <p:grpSpPr/>
       <p:pic>
         <p:nvPicPr>
-          <p:cNvPr id="2" name="Picture 1" descr="frame_01_hook.jpg"/>
+          <p:cNvPr id="2" name="Picture 1" descr="paper_card.png"/>
           <p:cNvPicPr>
             <a:picLocks noChangeAspect="1"/>
           </p:cNvPicPr>
@@ -3940,14 +4114,84 @@
         </p:blipFill>
         <p:spPr>
           <a:xfrm>
-            <a:off x="0" y="0"/>
-            <a:ext cx="5559552" cy="9875520"/>
+            <a:off x="502920" y="822960"/>
+            <a:ext cx="4553712" cy="8095488"/>
           </a:xfrm>
           <a:prstGeom prst="rect">
             <a:avLst/>
           </a:prstGeom>
         </p:spPr>
       </p:pic>
+      <p:sp>
+        <p:nvSpPr>
+          <p:cNvPr id="3" name="TextBox 2"/>
+          <p:cNvSpPr txBox="1"/>
+          <p:nvPr/>
+        </p:nvSpPr>
+        <p:spPr>
+          <a:xfrm>
+            <a:off x="365760" y="6766560"/>
+            <a:ext cx="4828032" cy="1828800"/>
+          </a:xfrm>
+          <a:prstGeom prst="rect">
+            <a:avLst/>
+          </a:prstGeom>
+          <a:noFill/>
+        </p:spPr>
+        <p:txBody>
+          <a:bodyPr wrap="square" anchor="ctr">
+            <a:spAutoFit/>
+          </a:bodyPr>
+          <a:lstStyle/>
+          <a:p>
+            <a:pPr algn="ctr"/>
+            <a:r>
+              <a:rPr sz="2000" b="1">
+                <a:solidFill>
+                  <a:srgbClr val="FFFFFF"/>
+                </a:solidFill>
+                <a:latin typeface="Arial"/>
+              </a:rPr>
+              <a:t>Dupilumab Combined with Topical 5% Minoxidil for Severe Alopecia Areata in a 2-Year-Old Child with Type 2 Immune Features: A Case Report</a:t>
+            </a:r>
+          </a:p>
+        </p:txBody>
+      </p:sp>
+      <p:sp>
+        <p:nvSpPr>
+          <p:cNvPr id="4" name="TextBox 3"/>
+          <p:cNvSpPr txBox="1"/>
+          <p:nvPr/>
+        </p:nvSpPr>
+        <p:spPr>
+          <a:xfrm>
+            <a:off x="365760" y="8595360"/>
+            <a:ext cx="4828032" cy="548640"/>
+          </a:xfrm>
+          <a:prstGeom prst="rect">
+            <a:avLst/>
+          </a:prstGeom>
+          <a:noFill/>
+        </p:spPr>
+        <p:txBody>
+          <a:bodyPr wrap="square" anchor="ctr">
+            <a:spAutoFit/>
+          </a:bodyPr>
+          <a:lstStyle/>
+          <a:p>
+            <a:pPr algn="ctr"/>
+            <a:r>
+              <a:rPr sz="1300" b="0">
+                <a:solidFill>
+                  <a:srgbClr val="AAAFCD"/>
+                </a:solidFill>
+                <a:latin typeface="Arial"/>
+              </a:rPr>
+              <a:t>Clinical, cosmetic and investigational dermatology  ·  2026</a:t>
+            </a:r>
+          </a:p>
+        </p:txBody>
+      </p:sp>
     </p:spTree>
   </p:cSld>
   <p:clrMapOvr>
@@ -3956,9 +4200,17 @@
 </p:sld>
 </file>
 
-<file path=ppt/slides/slide2.xml><?xml version="1.0" encoding="utf-8"?>
+<file path=ppt/slides/slide3.xml><?xml version="1.0" encoding="utf-8"?>
 <p:sld xmlns:a="http://schemas.openxmlformats.org/drawingml/2006/main" xmlns:p="http://schemas.openxmlformats.org/presentationml/2006/main" xmlns:r="http://schemas.openxmlformats.org/officeDocument/2006/relationships">
   <p:cSld>
+    <p:bg>
+      <p:bgPr>
+        <a:solidFill>
+          <a:srgbClr val="1B1F3B"/>
+        </a:solidFill>
+        <a:effectLst/>
+      </p:bgPr>
+    </p:bg>
     <p:spTree>
       <p:nvGrpSpPr>
         <p:cNvPr id="1" name=""/>
@@ -3968,7 +4220,7 @@
       <p:grpSpPr/>
       <p:pic>
         <p:nvPicPr>
-          <p:cNvPr id="2" name="Picture 1" descr="frame_02_paper_intro.jpg"/>
+          <p:cNvPr id="2" name="Picture 1" descr="topic_1.jpg"/>
           <p:cNvPicPr>
             <a:picLocks noChangeAspect="1"/>
           </p:cNvPicPr>
@@ -3982,14 +4234,93 @@
         </p:blipFill>
         <p:spPr>
           <a:xfrm>
-            <a:off x="0" y="0"/>
-            <a:ext cx="5559552" cy="9875520"/>
+            <a:off x="-3067027" y="0"/>
+            <a:ext cx="11693607" cy="9875520"/>
           </a:xfrm>
           <a:prstGeom prst="rect">
             <a:avLst/>
           </a:prstGeom>
         </p:spPr>
       </p:pic>
+      <p:sp>
+        <p:nvSpPr>
+          <p:cNvPr id="3" name="Rectangle 2"/>
+          <p:cNvSpPr/>
+          <p:nvPr/>
+        </p:nvSpPr>
+        <p:spPr>
+          <a:xfrm>
+            <a:off x="0" y="6122822"/>
+            <a:ext cx="5559552" cy="3752698"/>
+          </a:xfrm>
+          <a:prstGeom prst="rect">
+            <a:avLst/>
+          </a:prstGeom>
+          <a:solidFill>
+            <a:srgbClr val="000000"/>
+          </a:solidFill>
+          <a:ln>
+            <a:noFill/>
+          </a:ln>
+          <a:effectLst/>
+        </p:spPr>
+        <p:style>
+          <a:lnRef idx="1">
+            <a:schemeClr val="accent1"/>
+          </a:lnRef>
+          <a:fillRef idx="3">
+            <a:schemeClr val="accent1"/>
+          </a:fillRef>
+          <a:effectRef idx="2">
+            <a:schemeClr val="accent1"/>
+          </a:effectRef>
+          <a:fontRef idx="minor">
+            <a:schemeClr val="lt1"/>
+          </a:fontRef>
+        </p:style>
+        <p:txBody>
+          <a:bodyPr rtlCol="0" anchor="ctr"/>
+          <a:lstStyle/>
+          <a:p>
+            <a:pPr algn="ctr"/>
+          </a:p>
+        </p:txBody>
+      </p:sp>
+      <p:sp>
+        <p:nvSpPr>
+          <p:cNvPr id="4" name="TextBox 3"/>
+          <p:cNvSpPr txBox="1"/>
+          <p:nvPr/>
+        </p:nvSpPr>
+        <p:spPr>
+          <a:xfrm>
+            <a:off x="365760" y="6400800"/>
+            <a:ext cx="4828032" cy="2926080"/>
+          </a:xfrm>
+          <a:prstGeom prst="rect">
+            <a:avLst/>
+          </a:prstGeom>
+          <a:noFill/>
+        </p:spPr>
+        <p:txBody>
+          <a:bodyPr wrap="square" anchor="ctr">
+            <a:spAutoFit/>
+          </a:bodyPr>
+          <a:lstStyle/>
+          <a:p>
+            <a:pPr algn="ctr"/>
+            <a:r>
+              <a:rPr sz="2200" b="1">
+                <a:solidFill>
+                  <a:srgbClr val="FFFFFF"/>
+                </a:solidFill>
+                <a:latin typeface="Arial"/>
+              </a:rPr>
+              <a:t>Background: Severe alopecia areata (AA) in very young children is difficult to manage because evidence-based treatment options are limited and currently approved Janus kinase (JAK) inhibitor therapies do not cover children younger than 12 years.</a:t>
+            </a:r>
+          </a:p>
+        </p:txBody>
+      </p:sp>
     </p:spTree>
   </p:cSld>
   <p:clrMapOvr>
@@ -3998,9 +4329,17 @@
 </p:sld>
 </file>
 
-<file path=ppt/slides/slide3.xml><?xml version="1.0" encoding="utf-8"?>
+<file path=ppt/slides/slide4.xml><?xml version="1.0" encoding="utf-8"?>
 <p:sld xmlns:a="http://schemas.openxmlformats.org/drawingml/2006/main" xmlns:p="http://schemas.openxmlformats.org/presentationml/2006/main" xmlns:r="http://schemas.openxmlformats.org/officeDocument/2006/relationships">
   <p:cSld>
+    <p:bg>
+      <p:bgPr>
+        <a:solidFill>
+          <a:srgbClr val="1B1F3B"/>
+        </a:solidFill>
+        <a:effectLst/>
+      </p:bgPr>
+    </p:bg>
     <p:spTree>
       <p:nvGrpSpPr>
         <p:cNvPr id="1" name=""/>
@@ -4010,7 +4349,7 @@
       <p:grpSpPr/>
       <p:pic>
         <p:nvPicPr>
-          <p:cNvPr id="2" name="Picture 1" descr="frame_03_key_finding_1.jpg"/>
+          <p:cNvPr id="2" name="Picture 1" descr="topic_2.jpg"/>
           <p:cNvPicPr>
             <a:picLocks noChangeAspect="1"/>
           </p:cNvPicPr>
@@ -4024,14 +4363,93 @@
         </p:blipFill>
         <p:spPr>
           <a:xfrm>
-            <a:off x="0" y="0"/>
-            <a:ext cx="5559552" cy="9875520"/>
+            <a:off x="-923544" y="0"/>
+            <a:ext cx="7406640" cy="9875520"/>
           </a:xfrm>
           <a:prstGeom prst="rect">
             <a:avLst/>
           </a:prstGeom>
         </p:spPr>
       </p:pic>
+      <p:sp>
+        <p:nvSpPr>
+          <p:cNvPr id="3" name="Rectangle 2"/>
+          <p:cNvSpPr/>
+          <p:nvPr/>
+        </p:nvSpPr>
+        <p:spPr>
+          <a:xfrm>
+            <a:off x="0" y="6122822"/>
+            <a:ext cx="5559552" cy="3752698"/>
+          </a:xfrm>
+          <a:prstGeom prst="rect">
+            <a:avLst/>
+          </a:prstGeom>
+          <a:solidFill>
+            <a:srgbClr val="000000"/>
+          </a:solidFill>
+          <a:ln>
+            <a:noFill/>
+          </a:ln>
+          <a:effectLst/>
+        </p:spPr>
+        <p:style>
+          <a:lnRef idx="1">
+            <a:schemeClr val="accent1"/>
+          </a:lnRef>
+          <a:fillRef idx="3">
+            <a:schemeClr val="accent1"/>
+          </a:fillRef>
+          <a:effectRef idx="2">
+            <a:schemeClr val="accent1"/>
+          </a:effectRef>
+          <a:fontRef idx="minor">
+            <a:schemeClr val="lt1"/>
+          </a:fontRef>
+        </p:style>
+        <p:txBody>
+          <a:bodyPr rtlCol="0" anchor="ctr"/>
+          <a:lstStyle/>
+          <a:p>
+            <a:pPr algn="ctr"/>
+          </a:p>
+        </p:txBody>
+      </p:sp>
+      <p:sp>
+        <p:nvSpPr>
+          <p:cNvPr id="4" name="TextBox 3"/>
+          <p:cNvSpPr txBox="1"/>
+          <p:nvPr/>
+        </p:nvSpPr>
+        <p:spPr>
+          <a:xfrm>
+            <a:off x="365760" y="6400800"/>
+            <a:ext cx="4828032" cy="2926080"/>
+          </a:xfrm>
+          <a:prstGeom prst="rect">
+            <a:avLst/>
+          </a:prstGeom>
+          <a:noFill/>
+        </p:spPr>
+        <p:txBody>
+          <a:bodyPr wrap="square" anchor="ctr">
+            <a:spAutoFit/>
+          </a:bodyPr>
+          <a:lstStyle/>
+          <a:p>
+            <a:pPr algn="ctr"/>
+            <a:r>
+              <a:rPr sz="2200" b="1">
+                <a:solidFill>
+                  <a:srgbClr val="FFFFFF"/>
+                </a:solidFill>
+                <a:latin typeface="Arial"/>
+              </a:rPr>
+              <a:t>Case presentation: A 2-year-and-5-month-old girl with a 2-year history of progressive scalp hair loss presented with severe diffuse AA (Severity of Alopecia Tool [SALT] score, 85%).</a:t>
+            </a:r>
+          </a:p>
+        </p:txBody>
+      </p:sp>
     </p:spTree>
   </p:cSld>
   <p:clrMapOvr>
@@ -4040,9 +4458,17 @@
 </p:sld>
 </file>
 
-<file path=ppt/slides/slide4.xml><?xml version="1.0" encoding="utf-8"?>
+<file path=ppt/slides/slide5.xml><?xml version="1.0" encoding="utf-8"?>
 <p:sld xmlns:a="http://schemas.openxmlformats.org/drawingml/2006/main" xmlns:p="http://schemas.openxmlformats.org/presentationml/2006/main" xmlns:r="http://schemas.openxmlformats.org/officeDocument/2006/relationships">
   <p:cSld>
+    <p:bg>
+      <p:bgPr>
+        <a:solidFill>
+          <a:srgbClr val="1B1F3B"/>
+        </a:solidFill>
+        <a:effectLst/>
+      </p:bgPr>
+    </p:bg>
     <p:spTree>
       <p:nvGrpSpPr>
         <p:cNvPr id="1" name=""/>
@@ -4052,7 +4478,7 @@
       <p:grpSpPr/>
       <p:pic>
         <p:nvPicPr>
-          <p:cNvPr id="2" name="Picture 1" descr="frame_04_key_finding_2.jpg"/>
+          <p:cNvPr id="2" name="Picture 1" descr="latest.jpg"/>
           <p:cNvPicPr>
             <a:picLocks noChangeAspect="1"/>
           </p:cNvPicPr>
@@ -4066,56 +4492,93 @@
         </p:blipFill>
         <p:spPr>
           <a:xfrm>
-            <a:off x="0" y="0"/>
-            <a:ext cx="5559552" cy="9875520"/>
+            <a:off x="0" y="-4064"/>
+            <a:ext cx="5559552" cy="9883648"/>
           </a:xfrm>
           <a:prstGeom prst="rect">
             <a:avLst/>
           </a:prstGeom>
         </p:spPr>
       </p:pic>
-    </p:spTree>
-  </p:cSld>
-  <p:clrMapOvr>
-    <a:masterClrMapping/>
-  </p:clrMapOvr>
-</p:sld>
-</file>
-
-<file path=ppt/slides/slide5.xml><?xml version="1.0" encoding="utf-8"?>
-<p:sld xmlns:a="http://schemas.openxmlformats.org/drawingml/2006/main" xmlns:p="http://schemas.openxmlformats.org/presentationml/2006/main" xmlns:r="http://schemas.openxmlformats.org/officeDocument/2006/relationships">
-  <p:cSld>
-    <p:spTree>
-      <p:nvGrpSpPr>
-        <p:cNvPr id="1" name=""/>
-        <p:cNvGrpSpPr/>
-        <p:nvPr/>
-      </p:nvGrpSpPr>
-      <p:grpSpPr/>
-      <p:pic>
-        <p:nvPicPr>
-          <p:cNvPr id="2" name="Picture 1" descr="frame_05_my_take.jpg"/>
-          <p:cNvPicPr>
-            <a:picLocks noChangeAspect="1"/>
-          </p:cNvPicPr>
+      <p:sp>
+        <p:nvSpPr>
+          <p:cNvPr id="3" name="Rectangle 2"/>
+          <p:cNvSpPr/>
           <p:nvPr/>
-        </p:nvPicPr>
-        <p:blipFill>
-          <a:blip r:embed="rId2"/>
-          <a:stretch>
-            <a:fillRect/>
-          </a:stretch>
-        </p:blipFill>
+        </p:nvSpPr>
         <p:spPr>
           <a:xfrm>
-            <a:off x="0" y="0"/>
-            <a:ext cx="5559552" cy="9875520"/>
+            <a:off x="0" y="6122822"/>
+            <a:ext cx="5559552" cy="3752698"/>
           </a:xfrm>
           <a:prstGeom prst="rect">
             <a:avLst/>
           </a:prstGeom>
+          <a:solidFill>
+            <a:srgbClr val="000000"/>
+          </a:solidFill>
+          <a:ln>
+            <a:noFill/>
+          </a:ln>
+          <a:effectLst/>
         </p:spPr>
-      </p:pic>
+        <p:style>
+          <a:lnRef idx="1">
+            <a:schemeClr val="accent1"/>
+          </a:lnRef>
+          <a:fillRef idx="3">
+            <a:schemeClr val="accent1"/>
+          </a:fillRef>
+          <a:effectRef idx="2">
+            <a:schemeClr val="accent1"/>
+          </a:effectRef>
+          <a:fontRef idx="minor">
+            <a:schemeClr val="lt1"/>
+          </a:fontRef>
+        </p:style>
+        <p:txBody>
+          <a:bodyPr rtlCol="0" anchor="ctr"/>
+          <a:lstStyle/>
+          <a:p>
+            <a:pPr algn="ctr"/>
+          </a:p>
+        </p:txBody>
+      </p:sp>
+      <p:sp>
+        <p:nvSpPr>
+          <p:cNvPr id="4" name="TextBox 3"/>
+          <p:cNvSpPr txBox="1"/>
+          <p:nvPr/>
+        </p:nvSpPr>
+        <p:spPr>
+          <a:xfrm>
+            <a:off x="365760" y="6400800"/>
+            <a:ext cx="4828032" cy="2926080"/>
+          </a:xfrm>
+          <a:prstGeom prst="rect">
+            <a:avLst/>
+          </a:prstGeom>
+          <a:noFill/>
+        </p:spPr>
+        <p:txBody>
+          <a:bodyPr wrap="square" anchor="ctr">
+            <a:spAutoFit/>
+          </a:bodyPr>
+          <a:lstStyle/>
+          <a:p>
+            <a:pPr algn="ctr"/>
+            <a:r>
+              <a:rPr sz="2200" b="1">
+                <a:solidFill>
+                  <a:srgbClr val="FFFFFF"/>
+                </a:solidFill>
+                <a:latin typeface="Arial"/>
+              </a:rPr>
+              <a:t>탈모 연구, 매일 쉽게 정리해드립니다 🙂</a:t>
+            </a:r>
+          </a:p>
+        </p:txBody>
+      </p:sp>
     </p:spTree>
   </p:cSld>
   <p:clrMapOvr>
@@ -4127,6 +4590,14 @@
 <file path=ppt/slides/slide6.xml><?xml version="1.0" encoding="utf-8"?>
 <p:sld xmlns:a="http://schemas.openxmlformats.org/drawingml/2006/main" xmlns:p="http://schemas.openxmlformats.org/presentationml/2006/main" xmlns:r="http://schemas.openxmlformats.org/officeDocument/2006/relationships">
   <p:cSld>
+    <p:bg>
+      <p:bgPr>
+        <a:solidFill>
+          <a:srgbClr val="1B1F3B"/>
+        </a:solidFill>
+        <a:effectLst/>
+      </p:bgPr>
+    </p:bg>
     <p:spTree>
       <p:nvGrpSpPr>
         <p:cNvPr id="1" name=""/>
@@ -4134,30 +4605,41 @@
         <p:nvPr/>
       </p:nvGrpSpPr>
       <p:grpSpPr/>
-      <p:pic>
-        <p:nvPicPr>
-          <p:cNvPr id="2" name="Picture 1" descr="frame_06_cta.jpg"/>
-          <p:cNvPicPr>
-            <a:picLocks noChangeAspect="1"/>
-          </p:cNvPicPr>
+      <p:sp>
+        <p:nvSpPr>
+          <p:cNvPr id="2" name="TextBox 1"/>
+          <p:cNvSpPr txBox="1"/>
           <p:nvPr/>
-        </p:nvPicPr>
-        <p:blipFill>
-          <a:blip r:embed="rId2"/>
-          <a:stretch>
-            <a:fillRect/>
-          </a:stretch>
-        </p:blipFill>
+        </p:nvSpPr>
         <p:spPr>
           <a:xfrm>
-            <a:off x="0" y="0"/>
-            <a:ext cx="5559552" cy="9875520"/>
+            <a:off x="457200" y="3474720"/>
+            <a:ext cx="4645152" cy="2743200"/>
           </a:xfrm>
           <a:prstGeom prst="rect">
             <a:avLst/>
           </a:prstGeom>
+          <a:noFill/>
         </p:spPr>
-      </p:pic>
+        <p:txBody>
+          <a:bodyPr wrap="square" anchor="ctr">
+            <a:spAutoFit/>
+          </a:bodyPr>
+          <a:lstStyle/>
+          <a:p>
+            <a:pPr algn="ctr"/>
+            <a:r>
+              <a:rPr sz="3400" b="1">
+                <a:solidFill>
+                  <a:srgbClr val="FFFFFF"/>
+                </a:solidFill>
+                <a:latin typeface="Arial"/>
+              </a:rPr>
+              <a:t>더 자세한 내용은 원문 링크에서 확인하세요. 매일 새로운 탈모 연구, 팔로우하고 놓치지 마세요!</a:t>
+            </a:r>
+          </a:p>
+        </p:txBody>
+      </p:sp>
     </p:spTree>
   </p:cSld>
   <p:clrMapOvr>
@@ -4169,6 +4651,14 @@
 <file path=ppt/slides/slide7.xml><?xml version="1.0" encoding="utf-8"?>
 <p:sld xmlns:a="http://schemas.openxmlformats.org/drawingml/2006/main" xmlns:p="http://schemas.openxmlformats.org/presentationml/2006/main" xmlns:r="http://schemas.openxmlformats.org/officeDocument/2006/relationships">
   <p:cSld>
+    <p:bg>
+      <p:bgPr>
+        <a:solidFill>
+          <a:srgbClr val="12142A"/>
+        </a:solidFill>
+        <a:effectLst/>
+      </p:bgPr>
+    </p:bg>
     <p:spTree>
       <p:nvGrpSpPr>
         <p:cNvPr id="1" name=""/>
@@ -4184,8 +4674,8 @@
         </p:nvSpPr>
         <p:spPr>
           <a:xfrm>
-            <a:off x="365760" y="365760"/>
-            <a:ext cx="4828032" cy="3657600"/>
+            <a:off x="365760" y="731520"/>
+            <a:ext cx="4828032" cy="548640"/>
           </a:xfrm>
           <a:prstGeom prst="rect">
             <a:avLst/>
@@ -4193,23 +4683,67 @@
           <a:noFill/>
         </p:spPr>
         <p:txBody>
-          <a:bodyPr wrap="square">
+          <a:bodyPr wrap="square" anchor="ctr">
             <a:spAutoFit/>
           </a:bodyPr>
           <a:lstStyle/>
           <a:p>
-            <a:r>
-              <a:t>참고 자료 출처</a:t>
-            </a:r>
-          </a:p>
-          <a:p>
-            <a:r>
-              <a:t>Canine Flank Alopecia: A Narrative Review of Clinical Presentation, Genetic Basis, and Therapeutic Management</a:t>
-            </a:r>
-          </a:p>
-          <a:p>
-            <a:r>
-              <a:t>https://pubmed.ncbi.nlm.nih.gov/42722190/</a:t>
+            <a:pPr algn="ctr"/>
+            <a:r>
+              <a:rPr sz="2200" b="1">
+                <a:solidFill>
+                  <a:srgbClr val="FF6B6B"/>
+                </a:solidFill>
+                <a:latin typeface="Arial"/>
+              </a:rPr>
+              <a:t>출처</a:t>
+            </a:r>
+          </a:p>
+        </p:txBody>
+      </p:sp>
+      <p:sp>
+        <p:nvSpPr>
+          <p:cNvPr id="3" name="TextBox 2"/>
+          <p:cNvSpPr txBox="1"/>
+          <p:nvPr/>
+        </p:nvSpPr>
+        <p:spPr>
+          <a:xfrm>
+            <a:off x="365760" y="1463040"/>
+            <a:ext cx="4828032" cy="7680960"/>
+          </a:xfrm>
+          <a:prstGeom prst="rect">
+            <a:avLst/>
+          </a:prstGeom>
+          <a:noFill/>
+        </p:spPr>
+        <p:txBody>
+          <a:bodyPr wrap="square" anchor="t">
+            <a:spAutoFit/>
+          </a:bodyPr>
+          <a:lstStyle/>
+          <a:p>
+            <a:pPr algn="l"/>
+            <a:r>
+              <a:rPr sz="1000" b="0">
+                <a:solidFill>
+                  <a:srgbClr val="D5D8EA"/>
+                </a:solidFill>
+                <a:latin typeface="Arial"/>
+              </a:rPr>
+              <a:t>[출처]
+논문: Dupilumab Combined with Topical 5% Minoxidil for Severe Alopecia Areata in a 2-Year-Old Child with Type 2 Immune Features: A Case Report
+게재: Clinical, cosmetic and investigational dermatology
+원문: https://pubmed.ncbi.nlm.nih.gov/42719841/
+[이미지 출처]
+- Male pattern baldness.jpg / Originally uploaded by Lkinkade (Transferred by XenonX3) / CC BY-SA 2.5
+  https://commons.wikimedia.org/wiki/File:Male_pattern_baldness.jpg
+- Male-pattern hair loss.jpg / BlaiserPascal / CC BY-SA 4.0
+  https://commons.wikimedia.org/wiki/File:Male-pattern_hair_loss.jpg
+※ CC BY-SA 이미지가 포함되어 있습니다. 저작자 표시가 필수이며,
+  동일조건변경허락(ShareAlike) 조항이 영상 전체에 적용될 수 있으니
+  상업적 이용 시 해당 이미지를 교체하는 편이 안전합니다.
+</a:t>
             </a:r>
           </a:p>
         </p:txBody>

--- a/data/2026-09-11/slides.pptx
+++ b/data/2026-09-11/slides.pptx
@@ -12,6 +12,7 @@
     <p:sldId id="260" r:id="rId12"/>
     <p:sldId id="261" r:id="rId13"/>
     <p:sldId id="262" r:id="rId14"/>
+    <p:sldId id="263" r:id="rId15"/>
   </p:sldIdLst>
   <p:sldSz cx="5559552" cy="9875520" type="screen4x3"/>
   <p:notesSz cx="6858000" cy="9144000"/>
@@ -513,7 +514,7 @@
           </a:p>
           <a:p>
             <a:r>
-              <a:t>대본: 85% 이 숫자, 탈모 연구가 새로 내놨습니다</a:t>
+              <a:t>대본: 오늘의 논문 Indian journal of dermatology에 실린 새 연구입니다</a:t>
             </a:r>
           </a:p>
           <a:p>
@@ -593,7 +594,7 @@
           </a:p>
           <a:p>
             <a:r>
-              <a:t>대본: 《Clinical, cosmetic and investigational dermatology》 - Dupilumab Combined with Topical 5% Minoxidil for Severe Alopecia Areata in a 2-Year-Old Child with Type 2 Immune Features: A Case Report</a:t>
+              <a:t>대본: 《Indian journal of dermatology》 - 'Cutting Through the Roots': A Critical Appraisal of Transverse and Vertical Sectioning Techniques of Scalp Biopsy for Primary Alopecia</a:t>
             </a:r>
           </a:p>
           <a:p>
@@ -673,7 +674,7 @@
           </a:p>
           <a:p>
             <a:r>
-              <a:t>대본: Background: Severe alopecia areata (AA) in very young children is difficult to manage because evidence-based treatment options are limited and currently approved Janus kinase (JAK) inhibitor therapies do not cover children younger than 12 years.</a:t>
+              <a:t>대본: Alopecia, a prevalent and distressing condition with diverse aetiologies, encompasses both scarring and non-scarring types and necessitates accurate diagnostic approaches for effective management.</a:t>
             </a:r>
           </a:p>
           <a:p>
@@ -748,17 +749,17 @@
           <a:lstStyle/>
           <a:p>
             <a:r>
-              <a:t>[key_finding_2] 약 10초</a:t>
-            </a:r>
-          </a:p>
-          <a:p>
-            <a:r>
-              <a:t>대본: Case presentation: A 2-year-and-5-month-old girl with a 2-year history of progressive scalp hair loss presented with severe diffuse AA (Severity of Alopecia Tool [SALT] score, 85%).</a:t>
-            </a:r>
-          </a:p>
-          <a:p>
-            <a:r>
-              <a:t>연출 노트: 핵심 포인트 2.</a:t>
+              <a:t>[paper_table] 약 8초</a:t>
+            </a:r>
+          </a:p>
+          <a:p>
+            <a:r>
+              <a:t>대본: 표로 보면 이렇습니다. Common primary alopecia subtypes and their key histological features[12345]</a:t>
+            </a:r>
+          </a:p>
+          <a:p>
+            <a:r>
+              <a:t>연출 노트: 핵심 숫자 한 칸만 짚어준다. 표는 셀을 직접 수정할 수 있다.</a:t>
             </a:r>
           </a:p>
         </p:txBody>
@@ -828,17 +829,17 @@
           <a:lstStyle/>
           <a:p>
             <a:r>
-              <a:t>[my_take] 약 10초</a:t>
-            </a:r>
-          </a:p>
-          <a:p>
-            <a:r>
-              <a:t>대본: 탈모 연구, 매일 쉽게 정리해드립니다 🙂</a:t>
-            </a:r>
-          </a:p>
-          <a:p>
-            <a:r>
-              <a:t>연출 노트: 본인 사진 + 코멘트. 문구를 직접 바꿔 쓰세요.</a:t>
+              <a:t>[key_finding_2] 약 10초</a:t>
+            </a:r>
+          </a:p>
+          <a:p>
+            <a:r>
+              <a:t>대본: Apart from optimal biopsy site selection based on clinical suspicion, such as active borders for scarring alopecias and lesion borders for non-scarring alopecias, choice of appropriate method for grossing of alopecic scalp biopsies also forms a key step.</a:t>
+            </a:r>
+          </a:p>
+          <a:p>
+            <a:r>
+              <a:t>연출 노트: 핵심 포인트 2.</a:t>
             </a:r>
           </a:p>
         </p:txBody>
@@ -864,6 +865,86 @@
 </file>
 
 <file path=ppt/notesSlides/notesSlide6.xml><?xml version="1.0" encoding="utf-8"?>
+<p:notes xmlns:a="http://schemas.openxmlformats.org/drawingml/2006/main" xmlns:p="http://schemas.openxmlformats.org/presentationml/2006/main" xmlns:r="http://schemas.openxmlformats.org/officeDocument/2006/relationships">
+  <p:cSld>
+    <p:spTree>
+      <p:nvGrpSpPr>
+        <p:cNvPr id="1" name=""/>
+        <p:cNvGrpSpPr/>
+        <p:nvPr/>
+      </p:nvGrpSpPr>
+      <p:grpSpPr>
+        <a:xfrm>
+          <a:off x="0" y="0"/>
+          <a:ext cx="0" cy="0"/>
+          <a:chOff x="0" y="0"/>
+          <a:chExt cx="0" cy="0"/>
+        </a:xfrm>
+      </p:grpSpPr>
+      <p:sp>
+        <p:nvSpPr>
+          <p:cNvPr id="2" name="Slide Image Placeholder 1"/>
+          <p:cNvSpPr>
+            <a:spLocks noGrp="1"/>
+          </p:cNvSpPr>
+          <p:nvPr>
+            <p:ph type="sldImg" idx="2"/>
+          </p:nvPr>
+        </p:nvSpPr>
+        <p:spPr/>
+      </p:sp>
+      <p:sp>
+        <p:nvSpPr>
+          <p:cNvPr id="3" name="Notes Placeholder 2"/>
+          <p:cNvSpPr>
+            <a:spLocks noGrp="1"/>
+          </p:cNvSpPr>
+          <p:nvPr>
+            <p:ph type="body" idx="3" sz="quarter"/>
+          </p:nvPr>
+        </p:nvSpPr>
+        <p:spPr/>
+        <p:txBody>
+          <a:bodyPr/>
+          <a:lstStyle/>
+          <a:p>
+            <a:r>
+              <a:t>[my_take] 약 10초</a:t>
+            </a:r>
+          </a:p>
+          <a:p>
+            <a:r>
+              <a:t>대본: 탈모 연구, 매일 쉽게 정리해드립니다 🙂</a:t>
+            </a:r>
+          </a:p>
+          <a:p>
+            <a:r>
+              <a:t>연출 노트: 본인 사진 + 코멘트. 문구를 직접 바꿔 쓰세요.</a:t>
+            </a:r>
+          </a:p>
+        </p:txBody>
+      </p:sp>
+      <p:sp>
+        <p:nvSpPr>
+          <p:cNvPr id="4" name="Slide Number Placeholder 3"/>
+          <p:cNvSpPr>
+            <a:spLocks noGrp="1"/>
+          </p:cNvSpPr>
+          <p:nvPr>
+            <p:ph type="sldNum" idx="5" sz="quarter"/>
+          </p:nvPr>
+        </p:nvSpPr>
+        <p:spPr/>
+      </p:sp>
+    </p:spTree>
+  </p:cSld>
+  <p:clrMapOvr>
+    <a:masterClrMapping/>
+  </p:clrMapOvr>
+</p:notes>
+</file>
+
+<file path=ppt/notesSlides/notesSlide7.xml><?xml version="1.0" encoding="utf-8"?>
 <p:notes xmlns:a="http://schemas.openxmlformats.org/drawingml/2006/main" xmlns:p="http://schemas.openxmlformats.org/presentationml/2006/main" xmlns:r="http://schemas.openxmlformats.org/officeDocument/2006/relationships">
   <p:cSld>
     <p:spTree>
@@ -3962,7 +4043,7 @@
                 </a:solidFill>
                 <a:latin typeface="Arial"/>
               </a:rPr>
-              <a:t>CLINICAL, COSMETIC AND INVESTIGATIONAL D</a:t>
+              <a:t>INDIAN JOURNAL OF DERMATOLOGY</a:t>
             </a:r>
           </a:p>
         </p:txBody>
@@ -3997,7 +4078,7 @@
                 </a:solidFill>
                 <a:latin typeface="Arial"/>
               </a:rPr>
-              <a:t>85%</a:t>
+              <a:t>오늘의 논문</a:t>
             </a:r>
           </a:p>
         </p:txBody>
@@ -4032,7 +4113,7 @@
                 </a:solidFill>
                 <a:latin typeface="Arial"/>
               </a:rPr>
-              <a:t>이 숫자, 탈모 연구가 새로 내놨습니다</a:t>
+              <a:t>Indian journal of dermatology에 실린 새 연구입니다</a:t>
             </a:r>
           </a:p>
         </p:txBody>
@@ -4067,7 +4148,7 @@
                 </a:solidFill>
                 <a:latin typeface="Arial"/>
               </a:rPr>
-              <a:t>2026  |  매일 아침 탈모 연구 한 편</a:t>
+              <a:t>2026 Sep-Oct  |  매일 아침 탈모 연구 한 편</a:t>
             </a:r>
           </a:p>
         </p:txBody>
@@ -4152,7 +4233,7 @@
                 </a:solidFill>
                 <a:latin typeface="Arial"/>
               </a:rPr>
-              <a:t>Dupilumab Combined with Topical 5% Minoxidil for Severe Alopecia Areata in a 2-Year-Old Child with Type 2 Immune Features: A Case Report</a:t>
+              <a:t>'Cutting Through the Roots': A Critical Appraisal of Transverse and Vertical Sectioning Techniques of Scalp Biopsy for Primary Alopecia</a:t>
             </a:r>
           </a:p>
         </p:txBody>
@@ -4187,7 +4268,7 @@
                 </a:solidFill>
                 <a:latin typeface="Arial"/>
               </a:rPr>
-              <a:t>Clinical, cosmetic and investigational dermatology  ·  2026</a:t>
+              <a:t>Indian journal of dermatology  ·  2026 Sep-Oct</a:t>
             </a:r>
           </a:p>
         </p:txBody>
@@ -4316,7 +4397,7 @@
                 </a:solidFill>
                 <a:latin typeface="Arial"/>
               </a:rPr>
-              <a:t>Background: Severe alopecia areata (AA) in very young children is difficult to manage because evidence-based treatment options are limited and currently approved Janus kinase (JAK) inhibitor therapies do not cover children younger than 12 years.</a:t>
+              <a:t>Alopecia, a prevalent and distressing condition with diverse aetiologies, encompasses both scarring and non-scarring types and necessitates accurate diagnostic approaches for effective management.</a:t>
             </a:r>
           </a:p>
         </p:txBody>
@@ -4330,6 +4411,470 @@
 </file>
 
 <file path=ppt/slides/slide4.xml><?xml version="1.0" encoding="utf-8"?>
+<p:sld xmlns:a="http://schemas.openxmlformats.org/drawingml/2006/main" xmlns:p="http://schemas.openxmlformats.org/presentationml/2006/main" xmlns:r="http://schemas.openxmlformats.org/officeDocument/2006/relationships">
+  <p:cSld>
+    <p:bg>
+      <p:bgPr>
+        <a:solidFill>
+          <a:srgbClr val="12142A"/>
+        </a:solidFill>
+        <a:effectLst/>
+      </p:bgPr>
+    </p:bg>
+    <p:spTree>
+      <p:nvGrpSpPr>
+        <p:cNvPr id="1" name=""/>
+        <p:cNvGrpSpPr/>
+        <p:nvPr/>
+      </p:nvGrpSpPr>
+      <p:grpSpPr/>
+      <p:sp>
+        <p:nvSpPr>
+          <p:cNvPr id="2" name="TextBox 1"/>
+          <p:cNvSpPr txBox="1"/>
+          <p:nvPr/>
+        </p:nvSpPr>
+        <p:spPr>
+          <a:xfrm>
+            <a:off x="365760" y="1097280"/>
+            <a:ext cx="4828032" cy="548640"/>
+          </a:xfrm>
+          <a:prstGeom prst="rect">
+            <a:avLst/>
+          </a:prstGeom>
+          <a:noFill/>
+        </p:spPr>
+        <p:txBody>
+          <a:bodyPr wrap="square" anchor="ctr">
+            <a:spAutoFit/>
+          </a:bodyPr>
+          <a:lstStyle/>
+          <a:p>
+            <a:pPr algn="ctr"/>
+            <a:r>
+              <a:rPr sz="2000" b="1">
+                <a:solidFill>
+                  <a:srgbClr val="FF6B6B"/>
+                </a:solidFill>
+                <a:latin typeface="Arial"/>
+              </a:rPr>
+              <a:t>논문 Table 1</a:t>
+            </a:r>
+          </a:p>
+        </p:txBody>
+      </p:sp>
+      <p:sp>
+        <p:nvSpPr>
+          <p:cNvPr id="3" name="TextBox 2"/>
+          <p:cNvSpPr txBox="1"/>
+          <p:nvPr/>
+        </p:nvSpPr>
+        <p:spPr>
+          <a:xfrm>
+            <a:off x="365760" y="1737360"/>
+            <a:ext cx="4828032" cy="914400"/>
+          </a:xfrm>
+          <a:prstGeom prst="rect">
+            <a:avLst/>
+          </a:prstGeom>
+          <a:noFill/>
+        </p:spPr>
+        <p:txBody>
+          <a:bodyPr wrap="square" anchor="ctr">
+            <a:spAutoFit/>
+          </a:bodyPr>
+          <a:lstStyle/>
+          <a:p>
+            <a:pPr algn="ctr"/>
+            <a:r>
+              <a:rPr sz="1300" b="0">
+                <a:solidFill>
+                  <a:srgbClr val="AAAFCD"/>
+                </a:solidFill>
+                <a:latin typeface="Arial"/>
+              </a:rPr>
+              <a:t>Common primary alopecia subtypes and their key histological features[12345]</a:t>
+            </a:r>
+          </a:p>
+        </p:txBody>
+      </p:sp>
+      <p:graphicFrame>
+        <p:nvGraphicFramePr>
+          <p:cNvPr id="4" name="Table 3"/>
+          <p:cNvGraphicFramePr>
+            <a:graphicFrameLocks noGrp="1"/>
+          </p:cNvGraphicFramePr>
+          <p:nvPr/>
+        </p:nvGraphicFramePr>
+        <p:xfrm>
+          <a:off x="320040" y="2926080"/>
+          <a:ext cx="4919472" cy="3520440"/>
+        </p:xfrm>
+        <a:graphic>
+          <a:graphicData uri="http://schemas.openxmlformats.org/drawingml/2006/table">
+            <a:tbl>
+              <a:tblPr firstRow="1" bandRow="1">
+                <a:tableStyleId>{5C22544A-7EE6-4342-B048-85BDC9FD1C3A}</a:tableStyleId>
+              </a:tblPr>
+              <a:tblGrid>
+                <a:gridCol w="1639824"/>
+                <a:gridCol w="1639824"/>
+                <a:gridCol w="1639824"/>
+              </a:tblGrid>
+              <a:tr h="502920">
+                <a:tc>
+                  <a:txBody>
+                    <a:bodyPr/>
+                    <a:lstStyle/>
+                    <a:p>
+                      <a:pPr>
+                        <a:defRPr sz="1200" b="1">
+                          <a:latin typeface="Arial"/>
+                        </a:defRPr>
+                      </a:pPr>
+                      <a:r>
+                        <a:t>Broad category</a:t>
+                      </a:r>
+                    </a:p>
+                  </a:txBody>
+                  <a:tcPr/>
+                </a:tc>
+                <a:tc>
+                  <a:txBody>
+                    <a:bodyPr/>
+                    <a:lstStyle/>
+                    <a:p>
+                      <a:pPr>
+                        <a:defRPr sz="1200" b="1">
+                          <a:latin typeface="Arial"/>
+                        </a:defRPr>
+                      </a:pPr>
+                      <a:r>
+                        <a:t>Disease entity</a:t>
+                      </a:r>
+                    </a:p>
+                  </a:txBody>
+                  <a:tcPr/>
+                </a:tc>
+                <a:tc>
+                  <a:txBody>
+                    <a:bodyPr/>
+                    <a:lstStyle/>
+                    <a:p>
+                      <a:pPr>
+                        <a:defRPr sz="1200" b="1">
+                          <a:latin typeface="Arial"/>
+                        </a:defRPr>
+                      </a:pPr>
+                      <a:r>
+                        <a:t>Key histopathological findings</a:t>
+                      </a:r>
+                    </a:p>
+                  </a:txBody>
+                  <a:tcPr/>
+                </a:tc>
+              </a:tr>
+              <a:tr h="502920">
+                <a:tc>
+                  <a:txBody>
+                    <a:bodyPr/>
+                    <a:lstStyle/>
+                    <a:p>
+                      <a:pPr>
+                        <a:defRPr sz="1100" b="0">
+                          <a:latin typeface="Arial"/>
+                        </a:defRPr>
+                      </a:pPr>
+                    </a:p>
+                  </a:txBody>
+                  <a:tcPr/>
+                </a:tc>
+                <a:tc>
+                  <a:txBody>
+                    <a:bodyPr/>
+                    <a:lstStyle/>
+                    <a:p>
+                      <a:pPr>
+                        <a:defRPr sz="1100" b="0">
+                          <a:latin typeface="Arial"/>
+                        </a:defRPr>
+                      </a:pPr>
+                      <a:r>
+                        <a:t>Cutaneous/Discoid lupus erythematosus</a:t>
+                      </a:r>
+                    </a:p>
+                  </a:txBody>
+                  <a:tcPr/>
+                </a:tc>
+                <a:tc>
+                  <a:txBody>
+                    <a:bodyPr/>
+                    <a:lstStyle/>
+                    <a:p>
+                      <a:pPr>
+                        <a:defRPr sz="1100" b="0">
+                          <a:latin typeface="Arial"/>
+                        </a:defRPr>
+                      </a:pPr>
+                      <a:r>
+                        <a:t>• Follicular plugging</a:t>
+                      </a:r>
+                    </a:p>
+                  </a:txBody>
+                  <a:tcPr/>
+                </a:tc>
+              </a:tr>
+              <a:tr h="502920">
+                <a:tc>
+                  <a:txBody>
+                    <a:bodyPr/>
+                    <a:lstStyle/>
+                    <a:p>
+                      <a:pPr>
+                        <a:defRPr sz="1100" b="0">
+                          <a:latin typeface="Arial"/>
+                        </a:defRPr>
+                      </a:pPr>
+                      <a:r>
+                        <a:t>Scarring (cicatricial) alopecia</a:t>
+                      </a:r>
+                    </a:p>
+                  </a:txBody>
+                  <a:tcPr/>
+                </a:tc>
+                <a:tc>
+                  <a:txBody>
+                    <a:bodyPr/>
+                    <a:lstStyle/>
+                    <a:p>
+                      <a:pPr>
+                        <a:defRPr sz="1100" b="0">
+                          <a:latin typeface="Arial"/>
+                        </a:defRPr>
+                      </a:pPr>
+                    </a:p>
+                  </a:txBody>
+                  <a:tcPr/>
+                </a:tc>
+                <a:tc>
+                  <a:txBody>
+                    <a:bodyPr/>
+                    <a:lstStyle/>
+                    <a:p>
+                      <a:pPr>
+                        <a:defRPr sz="1100" b="0">
+                          <a:latin typeface="Arial"/>
+                        </a:defRPr>
+                      </a:pPr>
+                      <a:r>
+                        <a:t>• Vacuolar degeneration of the basal lay</a:t>
+                      </a:r>
+                    </a:p>
+                  </a:txBody>
+                  <a:tcPr/>
+                </a:tc>
+              </a:tr>
+              <a:tr h="502920">
+                <a:tc>
+                  <a:txBody>
+                    <a:bodyPr/>
+                    <a:lstStyle/>
+                    <a:p>
+                      <a:pPr>
+                        <a:defRPr sz="1100" b="0">
+                          <a:latin typeface="Arial"/>
+                        </a:defRPr>
+                      </a:pPr>
+                    </a:p>
+                  </a:txBody>
+                  <a:tcPr/>
+                </a:tc>
+                <a:tc>
+                  <a:txBody>
+                    <a:bodyPr/>
+                    <a:lstStyle/>
+                    <a:p>
+                      <a:pPr>
+                        <a:defRPr sz="1100" b="0">
+                          <a:latin typeface="Arial"/>
+                        </a:defRPr>
+                      </a:pPr>
+                    </a:p>
+                  </a:txBody>
+                  <a:tcPr/>
+                </a:tc>
+                <a:tc>
+                  <a:txBody>
+                    <a:bodyPr/>
+                    <a:lstStyle/>
+                    <a:p>
+                      <a:pPr>
+                        <a:defRPr sz="1100" b="0">
+                          <a:latin typeface="Arial"/>
+                        </a:defRPr>
+                      </a:pPr>
+                      <a:r>
+                        <a:t>• Thickened basement membrane of the epi</a:t>
+                      </a:r>
+                    </a:p>
+                  </a:txBody>
+                  <a:tcPr/>
+                </a:tc>
+              </a:tr>
+              <a:tr h="502920">
+                <a:tc>
+                  <a:txBody>
+                    <a:bodyPr/>
+                    <a:lstStyle/>
+                    <a:p>
+                      <a:pPr>
+                        <a:defRPr sz="1100" b="0">
+                          <a:latin typeface="Arial"/>
+                        </a:defRPr>
+                      </a:pPr>
+                    </a:p>
+                  </a:txBody>
+                  <a:tcPr/>
+                </a:tc>
+                <a:tc>
+                  <a:txBody>
+                    <a:bodyPr/>
+                    <a:lstStyle/>
+                    <a:p>
+                      <a:pPr>
+                        <a:defRPr sz="1100" b="0">
+                          <a:latin typeface="Arial"/>
+                        </a:defRPr>
+                      </a:pPr>
+                    </a:p>
+                  </a:txBody>
+                  <a:tcPr/>
+                </a:tc>
+                <a:tc>
+                  <a:txBody>
+                    <a:bodyPr/>
+                    <a:lstStyle/>
+                    <a:p>
+                      <a:pPr>
+                        <a:defRPr sz="1100" b="0">
+                          <a:latin typeface="Arial"/>
+                        </a:defRPr>
+                      </a:pPr>
+                      <a:r>
+                        <a:t>• Apoptotic keratinocytes</a:t>
+                      </a:r>
+                    </a:p>
+                  </a:txBody>
+                  <a:tcPr/>
+                </a:tc>
+              </a:tr>
+              <a:tr h="502920">
+                <a:tc>
+                  <a:txBody>
+                    <a:bodyPr/>
+                    <a:lstStyle/>
+                    <a:p>
+                      <a:pPr>
+                        <a:defRPr sz="1100" b="0">
+                          <a:latin typeface="Arial"/>
+                        </a:defRPr>
+                      </a:pPr>
+                    </a:p>
+                  </a:txBody>
+                  <a:tcPr/>
+                </a:tc>
+                <a:tc>
+                  <a:txBody>
+                    <a:bodyPr/>
+                    <a:lstStyle/>
+                    <a:p>
+                      <a:pPr>
+                        <a:defRPr sz="1100" b="0">
+                          <a:latin typeface="Arial"/>
+                        </a:defRPr>
+                      </a:pPr>
+                    </a:p>
+                  </a:txBody>
+                  <a:tcPr/>
+                </a:tc>
+                <a:tc>
+                  <a:txBody>
+                    <a:bodyPr/>
+                    <a:lstStyle/>
+                    <a:p>
+                      <a:pPr>
+                        <a:defRPr sz="1100" b="0">
+                          <a:latin typeface="Arial"/>
+                        </a:defRPr>
+                      </a:pPr>
+                      <a:r>
+                        <a:t>• Interface dermatitis</a:t>
+                      </a:r>
+                    </a:p>
+                  </a:txBody>
+                  <a:tcPr/>
+                </a:tc>
+              </a:tr>
+              <a:tr h="502920">
+                <a:tc>
+                  <a:txBody>
+                    <a:bodyPr/>
+                    <a:lstStyle/>
+                    <a:p>
+                      <a:pPr>
+                        <a:defRPr sz="1100" b="0">
+                          <a:latin typeface="Arial"/>
+                        </a:defRPr>
+                      </a:pPr>
+                    </a:p>
+                  </a:txBody>
+                  <a:tcPr/>
+                </a:tc>
+                <a:tc>
+                  <a:txBody>
+                    <a:bodyPr/>
+                    <a:lstStyle/>
+                    <a:p>
+                      <a:pPr>
+                        <a:defRPr sz="1100" b="0">
+                          <a:latin typeface="Arial"/>
+                        </a:defRPr>
+                      </a:pPr>
+                    </a:p>
+                  </a:txBody>
+                  <a:tcPr/>
+                </a:tc>
+                <a:tc>
+                  <a:txBody>
+                    <a:bodyPr/>
+                    <a:lstStyle/>
+                    <a:p>
+                      <a:pPr>
+                        <a:defRPr sz="1100" b="0">
+                          <a:latin typeface="Arial"/>
+                        </a:defRPr>
+                      </a:pPr>
+                      <a:r>
+                        <a:t>• Superficial and deep perifollicular an</a:t>
+                      </a:r>
+                    </a:p>
+                  </a:txBody>
+                  <a:tcPr/>
+                </a:tc>
+              </a:tr>
+            </a:tbl>
+          </a:graphicData>
+        </a:graphic>
+      </p:graphicFrame>
+    </p:spTree>
+  </p:cSld>
+  <p:clrMapOvr>
+    <a:masterClrMapping/>
+  </p:clrMapOvr>
+</p:sld>
+</file>
+
+<file path=ppt/slides/slide5.xml><?xml version="1.0" encoding="utf-8"?>
 <p:sld xmlns:a="http://schemas.openxmlformats.org/drawingml/2006/main" xmlns:p="http://schemas.openxmlformats.org/presentationml/2006/main" xmlns:r="http://schemas.openxmlformats.org/officeDocument/2006/relationships">
   <p:cSld>
     <p:bg>
@@ -4445,7 +4990,7 @@
                 </a:solidFill>
                 <a:latin typeface="Arial"/>
               </a:rPr>
-              <a:t>Case presentation: A 2-year-and-5-month-old girl with a 2-year history of progressive scalp hair loss presented with severe diffuse AA (Severity of Alopecia Tool [SALT] score, 85%).</a:t>
+              <a:t>Apart from optimal biopsy site selection based on clinical suspicion, such as active borders for scarring alopecias and lesion borders for non-scarring alopecias, choice of appropriate method for grossing of alopecic scalp biopsies also forms a key step.</a:t>
             </a:r>
           </a:p>
         </p:txBody>
@@ -4458,7 +5003,7 @@
 </p:sld>
 </file>
 
-<file path=ppt/slides/slide5.xml><?xml version="1.0" encoding="utf-8"?>
+<file path=ppt/slides/slide6.xml><?xml version="1.0" encoding="utf-8"?>
 <p:sld xmlns:a="http://schemas.openxmlformats.org/drawingml/2006/main" xmlns:p="http://schemas.openxmlformats.org/presentationml/2006/main" xmlns:r="http://schemas.openxmlformats.org/officeDocument/2006/relationships">
   <p:cSld>
     <p:bg>
@@ -4587,7 +5132,7 @@
 </p:sld>
 </file>
 
-<file path=ppt/slides/slide6.xml><?xml version="1.0" encoding="utf-8"?>
+<file path=ppt/slides/slide7.xml><?xml version="1.0" encoding="utf-8"?>
 <p:sld xmlns:a="http://schemas.openxmlformats.org/drawingml/2006/main" xmlns:p="http://schemas.openxmlformats.org/presentationml/2006/main" xmlns:r="http://schemas.openxmlformats.org/officeDocument/2006/relationships">
   <p:cSld>
     <p:bg>
@@ -4648,7 +5193,7 @@
 </p:sld>
 </file>
 
-<file path=ppt/slides/slide7.xml><?xml version="1.0" encoding="utf-8"?>
+<file path=ppt/slides/slide8.xml><?xml version="1.0" encoding="utf-8"?>
 <p:sld xmlns:a="http://schemas.openxmlformats.org/drawingml/2006/main" xmlns:p="http://schemas.openxmlformats.org/presentationml/2006/main" xmlns:r="http://schemas.openxmlformats.org/officeDocument/2006/relationships">
   <p:cSld>
     <p:bg>
@@ -4732,9 +5277,9 @@
                 <a:latin typeface="Arial"/>
               </a:rPr>
               <a:t>[출처]
-논문: Dupilumab Combined with Topical 5% Minoxidil for Severe Alopecia Areata in a 2-Year-Old Child with Type 2 Immune Features: A Case Report
-게재: Clinical, cosmetic and investigational dermatology
-원문: https://pubmed.ncbi.nlm.nih.gov/42719841/
+논문: 'Cutting Through the Roots': A Critical Appraisal of Transverse and Vertical Sectioning Techniques of Scalp Biopsy for Primary Alopecia
+게재: Indian journal of dermatology
+원문: https://pubmed.ncbi.nlm.nih.gov/42708156/
 [이미지 출처]
 - Male pattern baldness.jpg / Originally uploaded by Lkinkade (Transferred by XenonX3) / CC BY-SA 2.5
   https://commons.wikimedia.org/wiki/File:Male_pattern_baldness.jpg
@@ -4743,6 +5288,11 @@
 ※ CC BY-SA 이미지가 포함되어 있습니다. 저작자 표시가 필수이며,
   동일조건변경허락(ShareAlike) 조항이 영상 전체에 적용될 수 있으니
   상업적 이용 시 해당 이미지를 교체하는 편이 안전합니다.
+[논문 본문 그림·표]
+- PubMed Central PMC13549692 (재사용 가능 라이선스)
+  https://www.ncbi.nlm.nih.gov/pmc/articles/PMC13549692/
+  · Table 1
+  ※ 오픈액세스 논문의 그림·표이며, 위 원문 출처를 함께 표기하세요.
 </a:t>
             </a:r>
           </a:p>

--- a/data/2026-09-11/slides.pptx
+++ b/data/2026-09-11/slides.pptx
@@ -514,7 +514,7 @@
           </a:p>
           <a:p>
             <a:r>
-              <a:t>대본: 오늘의 논문 Indian journal of dermatology에 실린 새 연구입니다</a:t>
+              <a:t>대본: 93.16% 이 숫자, 탈모 연구가 새로 내놨습니다</a:t>
             </a:r>
           </a:p>
           <a:p>
@@ -594,7 +594,7 @@
           </a:p>
           <a:p>
             <a:r>
-              <a:t>대본: 《Indian journal of dermatology》 - 'Cutting Through the Roots': A Critical Appraisal of Transverse and Vertical Sectioning Techniques of Scalp Biopsy for Primary Alopecia</a:t>
+              <a:t>대본: 《Indian journal of dermatology》 - Effectiveness and Safety Profile of Oral Tofacitinib in Alopecia Areata: An Observational Study from a Tertiary Hospital</a:t>
             </a:r>
           </a:p>
           <a:p>
@@ -674,7 +674,7 @@
           </a:p>
           <a:p>
             <a:r>
-              <a:t>대본: Alopecia, a prevalent and distressing condition with diverse aetiologies, encompasses both scarring and non-scarring types and necessitates accurate diagnostic approaches for effective management.</a:t>
+              <a:t>대본: Results: SALT score at 6 months showed a mean SALT reduction of 79.27% (43.33% of patients), followed by 93.16% (26.67%), 28.24% (20%), and 3.76% (10%).</a:t>
             </a:r>
           </a:p>
           <a:p>
@@ -754,7 +754,7 @@
           </a:p>
           <a:p>
             <a:r>
-              <a:t>대본: 표로 보면 이렇습니다. Common primary alopecia subtypes and their key histological features[12345]</a:t>
+              <a:t>대본: 표로 보면 이렇습니다. SALT reduction with oral Tofacitinib at 3 and 6 months in Alopecia areata</a:t>
             </a:r>
           </a:p>
           <a:p>
@@ -834,7 +834,7 @@
           </a:p>
           <a:p>
             <a:r>
-              <a:t>대본: Apart from optimal biopsy site selection based on clinical suspicion, such as active borders for scarring alopecias and lesion borders for non-scarring alopecias, choice of appropriate method for grossing of alopecic scalp biopsies also forms a key step.</a:t>
+              <a:t>대본: Similarly, at 6 months, we observed a positive change in AAPS of 4.25 (&gt;90% SALT reduction) followed by 2.9 (50%-90%), 1.66 (10%-50%), and 1 (&lt;10%).</a:t>
             </a:r>
           </a:p>
           <a:p>
@@ -4078,7 +4078,7 @@
                 </a:solidFill>
                 <a:latin typeface="Arial"/>
               </a:rPr>
-              <a:t>오늘의 논문</a:t>
+              <a:t>93.16%</a:t>
             </a:r>
           </a:p>
         </p:txBody>
@@ -4113,7 +4113,7 @@
                 </a:solidFill>
                 <a:latin typeface="Arial"/>
               </a:rPr>
-              <a:t>Indian journal of dermatology에 실린 새 연구입니다</a:t>
+              <a:t>이 숫자, 탈모 연구가 새로 내놨습니다</a:t>
             </a:r>
           </a:p>
         </p:txBody>
@@ -4233,7 +4233,7 @@
                 </a:solidFill>
                 <a:latin typeface="Arial"/>
               </a:rPr>
-              <a:t>'Cutting Through the Roots': A Critical Appraisal of Transverse and Vertical Sectioning Techniques of Scalp Biopsy for Primary Alopecia</a:t>
+              <a:t>Effectiveness and Safety Profile of Oral Tofacitinib in Alopecia Areata: An Observational Study from a Tertiary Hospital</a:t>
             </a:r>
           </a:p>
         </p:txBody>
@@ -4397,7 +4397,7 @@
                 </a:solidFill>
                 <a:latin typeface="Arial"/>
               </a:rPr>
-              <a:t>Alopecia, a prevalent and distressing condition with diverse aetiologies, encompasses both scarring and non-scarring types and necessitates accurate diagnostic approaches for effective management.</a:t>
+              <a:t>Results: SALT score at 6 months showed a mean SALT reduction of 79.27% (43.33% of patients), followed by 93.16% (26.67%), 28.24% (20%), and 3.76% (10%).</a:t>
             </a:r>
           </a:p>
         </p:txBody>
@@ -4493,7 +4493,7 @@
                 </a:solidFill>
                 <a:latin typeface="Arial"/>
               </a:rPr>
-              <a:t>Common primary alopecia subtypes and their key histological features[12345]</a:t>
+              <a:t>SALT reduction with oral Tofacitinib at 3 and 6 months in Alopecia areata</a:t>
             </a:r>
           </a:p>
         </p:txBody>
@@ -4508,7 +4508,7 @@
         </p:nvGraphicFramePr>
         <p:xfrm>
           <a:off x="320040" y="2926080"/>
-          <a:ext cx="4919472" cy="3520440"/>
+          <a:ext cx="4919472" cy="2514600"/>
         </p:xfrm>
         <a:graphic>
           <a:graphicData uri="http://schemas.openxmlformats.org/drawingml/2006/table">
@@ -4517,9 +4517,10 @@
                 <a:tableStyleId>{5C22544A-7EE6-4342-B048-85BDC9FD1C3A}</a:tableStyleId>
               </a:tblPr>
               <a:tblGrid>
-                <a:gridCol w="1639824"/>
-                <a:gridCol w="1639824"/>
-                <a:gridCol w="1639824"/>
+                <a:gridCol w="1229868"/>
+                <a:gridCol w="1229868"/>
+                <a:gridCol w="1229868"/>
+                <a:gridCol w="1229868"/>
               </a:tblGrid>
               <a:tr h="502920">
                 <a:tc>
@@ -4533,7 +4534,7 @@
                         </a:defRPr>
                       </a:pPr>
                       <a:r>
-                        <a:t>Broad category</a:t>
+                        <a:t>Group</a:t>
                       </a:r>
                     </a:p>
                   </a:txBody>
@@ -4550,7 +4551,7 @@
                         </a:defRPr>
                       </a:pPr>
                       <a:r>
-                        <a:t>Disease entity</a:t>
+                        <a:t>Mean percentage SALT reduction at 3 mont</a:t>
                       </a:r>
                     </a:p>
                   </a:txBody>
@@ -4567,40 +4568,7 @@
                         </a:defRPr>
                       </a:pPr>
                       <a:r>
-                        <a:t>Key histopathological findings</a:t>
-                      </a:r>
-                    </a:p>
-                  </a:txBody>
-                  <a:tcPr/>
-                </a:tc>
-              </a:tr>
-              <a:tr h="502920">
-                <a:tc>
-                  <a:txBody>
-                    <a:bodyPr/>
-                    <a:lstStyle/>
-                    <a:p>
-                      <a:pPr>
-                        <a:defRPr sz="1100" b="0">
-                          <a:latin typeface="Arial"/>
-                        </a:defRPr>
-                      </a:pPr>
-                    </a:p>
-                  </a:txBody>
-                  <a:tcPr/>
-                </a:tc>
-                <a:tc>
-                  <a:txBody>
-                    <a:bodyPr/>
-                    <a:lstStyle/>
-                    <a:p>
-                      <a:pPr>
-                        <a:defRPr sz="1100" b="0">
-                          <a:latin typeface="Arial"/>
-                        </a:defRPr>
-                      </a:pPr>
-                      <a:r>
-                        <a:t>Cutaneous/Discoid lupus erythematosus</a:t>
+                        <a:t>P</a:t>
                       </a:r>
                     </a:p>
                   </a:txBody>
@@ -4612,12 +4580,12 @@
                     <a:lstStyle/>
                     <a:p>
                       <a:pPr>
-                        <a:defRPr sz="1100" b="0">
+                        <a:defRPr sz="1200" b="1">
                           <a:latin typeface="Arial"/>
                         </a:defRPr>
                       </a:pPr>
                       <a:r>
-                        <a:t>• Follicular plugging</a:t>
+                        <a:t>Group</a:t>
                       </a:r>
                     </a:p>
                   </a:txBody>
@@ -4636,7 +4604,7 @@
                         </a:defRPr>
                       </a:pPr>
                       <a:r>
-                        <a:t>Scarring (cicatricial) alopecia</a:t>
+                        <a:t>&lt;10% reduction</a:t>
                       </a:r>
                     </a:p>
                   </a:txBody>
@@ -4652,6 +4620,9 @@
                           <a:latin typeface="Arial"/>
                         </a:defRPr>
                       </a:pPr>
+                      <a:r>
+                        <a:t>2.06%</a:t>
+                      </a:r>
                     </a:p>
                   </a:txBody>
                   <a:tcPr/>
@@ -4667,7 +4638,24 @@
                         </a:defRPr>
                       </a:pPr>
                       <a:r>
-                        <a:t>• Vacuolar degeneration of the basal lay</a:t>
+                        <a:t>0.04</a:t>
+                      </a:r>
+                    </a:p>
+                  </a:txBody>
+                  <a:tcPr/>
+                </a:tc>
+                <a:tc>
+                  <a:txBody>
+                    <a:bodyPr/>
+                    <a:lstStyle/>
+                    <a:p>
+                      <a:pPr>
+                        <a:defRPr sz="1100" b="0">
+                          <a:latin typeface="Arial"/>
+                        </a:defRPr>
+                      </a:pPr>
+                      <a:r>
+                        <a:t>&lt;10% reduction</a:t>
                       </a:r>
                     </a:p>
                   </a:txBody>
@@ -4685,20 +4673,9 @@
                           <a:latin typeface="Arial"/>
                         </a:defRPr>
                       </a:pPr>
-                    </a:p>
-                  </a:txBody>
-                  <a:tcPr/>
-                </a:tc>
-                <a:tc>
-                  <a:txBody>
-                    <a:bodyPr/>
-                    <a:lstStyle/>
-                    <a:p>
-                      <a:pPr>
-                        <a:defRPr sz="1100" b="0">
-                          <a:latin typeface="Arial"/>
-                        </a:defRPr>
-                      </a:pPr>
+                      <a:r>
+                        <a:t>10–50% reduction</a:t>
+                      </a:r>
                     </a:p>
                   </a:txBody>
                   <a:tcPr/>
@@ -4714,7 +4691,41 @@
                         </a:defRPr>
                       </a:pPr>
                       <a:r>
-                        <a:t>• Thickened basement membrane of the epi</a:t>
+                        <a:t>35.31%</a:t>
+                      </a:r>
+                    </a:p>
+                  </a:txBody>
+                  <a:tcPr/>
+                </a:tc>
+                <a:tc>
+                  <a:txBody>
+                    <a:bodyPr/>
+                    <a:lstStyle/>
+                    <a:p>
+                      <a:pPr>
+                        <a:defRPr sz="1100" b="0">
+                          <a:latin typeface="Arial"/>
+                        </a:defRPr>
+                      </a:pPr>
+                      <a:r>
+                        <a:t>&lt;0.001</a:t>
+                      </a:r>
+                    </a:p>
+                  </a:txBody>
+                  <a:tcPr/>
+                </a:tc>
+                <a:tc>
+                  <a:txBody>
+                    <a:bodyPr/>
+                    <a:lstStyle/>
+                    <a:p>
+                      <a:pPr>
+                        <a:defRPr sz="1100" b="0">
+                          <a:latin typeface="Arial"/>
+                        </a:defRPr>
+                      </a:pPr>
+                      <a:r>
+                        <a:t>10–50% reduction</a:t>
                       </a:r>
                     </a:p>
                   </a:txBody>
@@ -4732,20 +4743,9 @@
                           <a:latin typeface="Arial"/>
                         </a:defRPr>
                       </a:pPr>
-                    </a:p>
-                  </a:txBody>
-                  <a:tcPr/>
-                </a:tc>
-                <a:tc>
-                  <a:txBody>
-                    <a:bodyPr/>
-                    <a:lstStyle/>
-                    <a:p>
-                      <a:pPr>
-                        <a:defRPr sz="1100" b="0">
-                          <a:latin typeface="Arial"/>
-                        </a:defRPr>
-                      </a:pPr>
+                      <a:r>
+                        <a:t>50–90% reduction</a:t>
+                      </a:r>
                     </a:p>
                   </a:txBody>
                   <a:tcPr/>
@@ -4761,7 +4761,41 @@
                         </a:defRPr>
                       </a:pPr>
                       <a:r>
-                        <a:t>• Apoptotic keratinocytes</a:t>
+                        <a:t>59.75%</a:t>
+                      </a:r>
+                    </a:p>
+                  </a:txBody>
+                  <a:tcPr/>
+                </a:tc>
+                <a:tc>
+                  <a:txBody>
+                    <a:bodyPr/>
+                    <a:lstStyle/>
+                    <a:p>
+                      <a:pPr>
+                        <a:defRPr sz="1100" b="0">
+                          <a:latin typeface="Arial"/>
+                        </a:defRPr>
+                      </a:pPr>
+                      <a:r>
+                        <a:t>&lt;0.001</a:t>
+                      </a:r>
+                    </a:p>
+                  </a:txBody>
+                  <a:tcPr/>
+                </a:tc>
+                <a:tc>
+                  <a:txBody>
+                    <a:bodyPr/>
+                    <a:lstStyle/>
+                    <a:p>
+                      <a:pPr>
+                        <a:defRPr sz="1100" b="0">
+                          <a:latin typeface="Arial"/>
+                        </a:defRPr>
+                      </a:pPr>
+                      <a:r>
+                        <a:t>50–90% reduction</a:t>
                       </a:r>
                     </a:p>
                   </a:txBody>
@@ -4779,20 +4813,9 @@
                           <a:latin typeface="Arial"/>
                         </a:defRPr>
                       </a:pPr>
-                    </a:p>
-                  </a:txBody>
-                  <a:tcPr/>
-                </a:tc>
-                <a:tc>
-                  <a:txBody>
-                    <a:bodyPr/>
-                    <a:lstStyle/>
-                    <a:p>
-                      <a:pPr>
-                        <a:defRPr sz="1100" b="0">
-                          <a:latin typeface="Arial"/>
-                        </a:defRPr>
-                      </a:pPr>
+                      <a:r>
+                        <a:t>&gt;90% reduction</a:t>
+                      </a:r>
                     </a:p>
                   </a:txBody>
                   <a:tcPr/>
@@ -4808,38 +4831,8 @@
                         </a:defRPr>
                       </a:pPr>
                       <a:r>
-                        <a:t>• Interface dermatitis</a:t>
+                        <a:t>-</a:t>
                       </a:r>
-                    </a:p>
-                  </a:txBody>
-                  <a:tcPr/>
-                </a:tc>
-              </a:tr>
-              <a:tr h="502920">
-                <a:tc>
-                  <a:txBody>
-                    <a:bodyPr/>
-                    <a:lstStyle/>
-                    <a:p>
-                      <a:pPr>
-                        <a:defRPr sz="1100" b="0">
-                          <a:latin typeface="Arial"/>
-                        </a:defRPr>
-                      </a:pPr>
-                    </a:p>
-                  </a:txBody>
-                  <a:tcPr/>
-                </a:tc>
-                <a:tc>
-                  <a:txBody>
-                    <a:bodyPr/>
-                    <a:lstStyle/>
-                    <a:p>
-                      <a:pPr>
-                        <a:defRPr sz="1100" b="0">
-                          <a:latin typeface="Arial"/>
-                        </a:defRPr>
-                      </a:pPr>
                     </a:p>
                   </a:txBody>
                   <a:tcPr/>
@@ -4855,7 +4848,24 @@
                         </a:defRPr>
                       </a:pPr>
                       <a:r>
-                        <a:t>• Superficial and deep perifollicular an</a:t>
+                        <a:t>-</a:t>
+                      </a:r>
+                    </a:p>
+                  </a:txBody>
+                  <a:tcPr/>
+                </a:tc>
+                <a:tc>
+                  <a:txBody>
+                    <a:bodyPr/>
+                    <a:lstStyle/>
+                    <a:p>
+                      <a:pPr>
+                        <a:defRPr sz="1100" b="0">
+                          <a:latin typeface="Arial"/>
+                        </a:defRPr>
+                      </a:pPr>
+                      <a:r>
+                        <a:t>&gt;90% reduction</a:t>
                       </a:r>
                     </a:p>
                   </a:txBody>
@@ -4990,7 +5000,7 @@
                 </a:solidFill>
                 <a:latin typeface="Arial"/>
               </a:rPr>
-              <a:t>Apart from optimal biopsy site selection based on clinical suspicion, such as active borders for scarring alopecias and lesion borders for non-scarring alopecias, choice of appropriate method for grossing of alopecic scalp biopsies also forms a key step.</a:t>
+              <a:t>Similarly, at 6 months, we observed a positive change in AAPS of 4.25 (&gt;90% SALT reduction) followed by 2.9 (50%-90%), 1.66 (10%-50%), and 1 (&lt;10%).</a:t>
             </a:r>
           </a:p>
         </p:txBody>
@@ -5277,9 +5287,9 @@
                 <a:latin typeface="Arial"/>
               </a:rPr>
               <a:t>[출처]
-논문: 'Cutting Through the Roots': A Critical Appraisal of Transverse and Vertical Sectioning Techniques of Scalp Biopsy for Primary Alopecia
+논문: Effectiveness and Safety Profile of Oral Tofacitinib in Alopecia Areata: An Observational Study from a Tertiary Hospital
 게재: Indian journal of dermatology
-원문: https://pubmed.ncbi.nlm.nih.gov/42708156/
+원문: https://pubmed.ncbi.nlm.nih.gov/42708150/
 [이미지 출처]
 - Male pattern baldness.jpg / Originally uploaded by Lkinkade (Transferred by XenonX3) / CC BY-SA 2.5
   https://commons.wikimedia.org/wiki/File:Male_pattern_baldness.jpg
@@ -5289,8 +5299,8 @@
   동일조건변경허락(ShareAlike) 조항이 영상 전체에 적용될 수 있으니
   상업적 이용 시 해당 이미지를 교체하는 편이 안전합니다.
 [논문 본문 그림·표]
-- PubMed Central PMC13549692 (재사용 가능 라이선스)
-  https://www.ncbi.nlm.nih.gov/pmc/articles/PMC13549692/
+- PubMed Central PMC13549691 (재사용 가능 라이선스)
+  https://www.ncbi.nlm.nih.gov/pmc/articles/PMC13549691/
   · Table 1
   ※ 오픈액세스 논문의 그림·표이며, 위 원문 출처를 함께 표기하세요.
 </a:t>

--- a/data/2026-09-11/slides.pptx
+++ b/data/2026-09-11/slides.pptx
@@ -514,7 +514,7 @@
           </a:p>
           <a:p>
             <a:r>
-              <a:t>대본: 93.16% 이 숫자, 탈모 연구가 새로 내놨습니다</a:t>
+              <a:t>대본: 원형탈모 오늘 나온 최신 연구를 정리했습니다</a:t>
             </a:r>
           </a:p>
           <a:p>
@@ -594,7 +594,7 @@
           </a:p>
           <a:p>
             <a:r>
-              <a:t>대본: 《Indian journal of dermatology》 - Effectiveness and Safety Profile of Oral Tofacitinib in Alopecia Areata: An Observational Study from a Tertiary Hospital</a:t>
+              <a:t>대본: 《Frontiers in medicine》 - IL-15 in alopecia areata: the immune tolerance mechanistic insights and translational perspectives</a:t>
             </a:r>
           </a:p>
           <a:p>
@@ -674,7 +674,7 @@
           </a:p>
           <a:p>
             <a:r>
-              <a:t>대본: Results: SALT score at 6 months showed a mean SALT reduction of 79.27% (43.33% of patients), followed by 93.16% (26.67%), 28.24% (20%), and 3.76% (10%).</a:t>
+              <a:t>대본: In the past, IL-2 and IL-15 are generally recognized for their roles in promoting pro-inflammatory immune responses.</a:t>
             </a:r>
           </a:p>
           <a:p>
@@ -754,7 +754,7 @@
           </a:p>
           <a:p>
             <a:r>
-              <a:t>대본: 표로 보면 이렇습니다. SALT reduction with oral Tofacitinib at 3 and 6 months in Alopecia areata</a:t>
+              <a:t>대본: 표로 보면 이렇습니다. The comparison of IL-15 effect in different studies of AA.</a:t>
             </a:r>
           </a:p>
           <a:p>
@@ -834,7 +834,7 @@
           </a:p>
           <a:p>
             <a:r>
-              <a:t>대본: Similarly, at 6 months, we observed a positive change in AAPS of 4.25 (&gt;90% SALT reduction) followed by 2.9 (50%-90%), 1.66 (10%-50%), and 1 (&lt;10%).</a:t>
+              <a:t>대본: Moreover, cytokine-based therapeutic strategies utilizing IL-2 or IL-15 have the capacity to expand effector T cell and NK cells, thereby offering a viable alternative immunotherapeutic approach for cancer treatment.</a:t>
             </a:r>
           </a:p>
           <a:p>
@@ -4043,7 +4043,7 @@
                 </a:solidFill>
                 <a:latin typeface="Arial"/>
               </a:rPr>
-              <a:t>INDIAN JOURNAL OF DERMATOLOGY</a:t>
+              <a:t>FRONTIERS IN MEDICINE</a:t>
             </a:r>
           </a:p>
         </p:txBody>
@@ -4078,7 +4078,7 @@
                 </a:solidFill>
                 <a:latin typeface="Arial"/>
               </a:rPr>
-              <a:t>93.16%</a:t>
+              <a:t>원형탈모</a:t>
             </a:r>
           </a:p>
         </p:txBody>
@@ -4113,7 +4113,7 @@
                 </a:solidFill>
                 <a:latin typeface="Arial"/>
               </a:rPr>
-              <a:t>이 숫자, 탈모 연구가 새로 내놨습니다</a:t>
+              <a:t>오늘 나온 최신 연구를 정리했습니다</a:t>
             </a:r>
           </a:p>
         </p:txBody>
@@ -4148,7 +4148,7 @@
                 </a:solidFill>
                 <a:latin typeface="Arial"/>
               </a:rPr>
-              <a:t>2026 Sep-Oct  |  매일 아침 탈모 연구 한 편</a:t>
+              <a:t>2026  |  매일 아침 탈모 연구 한 편</a:t>
             </a:r>
           </a:p>
         </p:txBody>
@@ -4233,7 +4233,7 @@
                 </a:solidFill>
                 <a:latin typeface="Arial"/>
               </a:rPr>
-              <a:t>Effectiveness and Safety Profile of Oral Tofacitinib in Alopecia Areata: An Observational Study from a Tertiary Hospital</a:t>
+              <a:t>IL-15 in alopecia areata: the immune tolerance mechanistic insights and translational perspectives</a:t>
             </a:r>
           </a:p>
         </p:txBody>
@@ -4268,7 +4268,7 @@
                 </a:solidFill>
                 <a:latin typeface="Arial"/>
               </a:rPr>
-              <a:t>Indian journal of dermatology  ·  2026 Sep-Oct</a:t>
+              <a:t>Frontiers in medicine  ·  2026</a:t>
             </a:r>
           </a:p>
         </p:txBody>
@@ -4397,7 +4397,7 @@
                 </a:solidFill>
                 <a:latin typeface="Arial"/>
               </a:rPr>
-              <a:t>Results: SALT score at 6 months showed a mean SALT reduction of 79.27% (43.33% of patients), followed by 93.16% (26.67%), 28.24% (20%), and 3.76% (10%).</a:t>
+              <a:t>In the past, IL-2 and IL-15 are generally recognized for their roles in promoting pro-inflammatory immune responses.</a:t>
             </a:r>
           </a:p>
         </p:txBody>
@@ -4493,7 +4493,7 @@
                 </a:solidFill>
                 <a:latin typeface="Arial"/>
               </a:rPr>
-              <a:t>SALT reduction with oral Tofacitinib at 3 and 6 months in Alopecia areata</a:t>
+              <a:t>The comparison of IL-15 effect in different studies of AA.</a:t>
             </a:r>
           </a:p>
         </p:txBody>
@@ -4508,7 +4508,7 @@
         </p:nvGraphicFramePr>
         <p:xfrm>
           <a:off x="320040" y="2926080"/>
-          <a:ext cx="4919472" cy="2514600"/>
+          <a:ext cx="4919472" cy="2011680"/>
         </p:xfrm>
         <a:graphic>
           <a:graphicData uri="http://schemas.openxmlformats.org/drawingml/2006/table">
@@ -4534,7 +4534,7 @@
                         </a:defRPr>
                       </a:pPr>
                       <a:r>
-                        <a:t>Group</a:t>
+                        <a:t>Study</a:t>
                       </a:r>
                     </a:p>
                   </a:txBody>
@@ -4551,7 +4551,7 @@
                         </a:defRPr>
                       </a:pPr>
                       <a:r>
-                        <a:t>Mean percentage SALT reduction at 3 mont</a:t>
+                        <a:t>Model</a:t>
                       </a:r>
                     </a:p>
                   </a:txBody>
@@ -4568,7 +4568,7 @@
                         </a:defRPr>
                       </a:pPr>
                       <a:r>
-                        <a:t>P</a:t>
+                        <a:t>IL-15 exposure</a:t>
                       </a:r>
                     </a:p>
                   </a:txBody>
@@ -4585,7 +4585,7 @@
                         </a:defRPr>
                       </a:pPr>
                       <a:r>
-                        <a:t>Group</a:t>
+                        <a:t>Main finding</a:t>
                       </a:r>
                     </a:p>
                   </a:txBody>
@@ -4604,7 +4604,7 @@
                         </a:defRPr>
                       </a:pPr>
                       <a:r>
-                        <a:t>&lt;10% reduction</a:t>
+                        <a:t>Suzuki et al., 2024 (76)</a:t>
                       </a:r>
                     </a:p>
                   </a:txBody>
@@ -4621,7 +4621,7 @@
                         </a:defRPr>
                       </a:pPr>
                       <a:r>
-                        <a:t>2.06%</a:t>
+                        <a:t>Human AA tissue;ex vivo human hair folli</a:t>
                       </a:r>
                     </a:p>
                   </a:txBody>
@@ -4638,7 +4638,7 @@
                         </a:defRPr>
                       </a:pPr>
                       <a:r>
-                        <a:t>0.04</a:t>
+                        <a:t>rhIL-15 exact concentration reported in </a:t>
                       </a:r>
                     </a:p>
                   </a:txBody>
@@ -4655,7 +4655,7 @@
                         </a:defRPr>
                       </a:pPr>
                       <a:r>
-                        <a:t>&lt;10% reduction</a:t>
+                        <a:t>IL-15 exerts the anti-inflammatory effec</a:t>
                       </a:r>
                     </a:p>
                   </a:txBody>
@@ -4674,7 +4674,7 @@
                         </a:defRPr>
                       </a:pPr>
                       <a:r>
-                        <a:t>10–50% reduction</a:t>
+                        <a:t>Suzuki et al., 2024 (82)</a:t>
                       </a:r>
                     </a:p>
                   </a:txBody>
@@ -4691,7 +4691,7 @@
                         </a:defRPr>
                       </a:pPr>
                       <a:r>
-                        <a:t>35.31%</a:t>
+                        <a:t>Human AA tissue</a:t>
                       </a:r>
                     </a:p>
                   </a:txBody>
@@ -4708,7 +4708,7 @@
                         </a:defRPr>
                       </a:pPr>
                       <a:r>
-                        <a:t>&lt;0.001</a:t>
+                        <a:t>rhIL-15(1, 50 and 100 ng/ml)</a:t>
                       </a:r>
                     </a:p>
                   </a:txBody>
@@ -4725,7 +4725,7 @@
                         </a:defRPr>
                       </a:pPr>
                       <a:r>
-                        <a:t>10–50% reduction</a:t>
+                        <a:t>IL-15 promotes hair follicles growth in </a:t>
                       </a:r>
                     </a:p>
                   </a:txBody>
@@ -4744,7 +4744,7 @@
                         </a:defRPr>
                       </a:pPr>
                       <a:r>
-                        <a:t>50–90% reduction</a:t>
+                        <a:t>Seok et al., 2023 (75)</a:t>
                       </a:r>
                     </a:p>
                   </a:txBody>
@@ -4761,7 +4761,7 @@
                         </a:defRPr>
                       </a:pPr>
                       <a:r>
-                        <a:t>59.75%</a:t>
+                        <a:t>AA mouse model;cell culture</a:t>
                       </a:r>
                     </a:p>
                   </a:txBody>
@@ -4778,7 +4778,7 @@
                         </a:defRPr>
                       </a:pPr>
                       <a:r>
-                        <a:t>&lt;0.001</a:t>
+                        <a:t>IL-15</a:t>
                       </a:r>
                     </a:p>
                   </a:txBody>
@@ -4795,77 +4795,7 @@
                         </a:defRPr>
                       </a:pPr>
                       <a:r>
-                        <a:t>50–90% reduction</a:t>
-                      </a:r>
-                    </a:p>
-                  </a:txBody>
-                  <a:tcPr/>
-                </a:tc>
-              </a:tr>
-              <a:tr h="502920">
-                <a:tc>
-                  <a:txBody>
-                    <a:bodyPr/>
-                    <a:lstStyle/>
-                    <a:p>
-                      <a:pPr>
-                        <a:defRPr sz="1100" b="0">
-                          <a:latin typeface="Arial"/>
-                        </a:defRPr>
-                      </a:pPr>
-                      <a:r>
-                        <a:t>&gt;90% reduction</a:t>
-                      </a:r>
-                    </a:p>
-                  </a:txBody>
-                  <a:tcPr/>
-                </a:tc>
-                <a:tc>
-                  <a:txBody>
-                    <a:bodyPr/>
-                    <a:lstStyle/>
-                    <a:p>
-                      <a:pPr>
-                        <a:defRPr sz="1100" b="0">
-                          <a:latin typeface="Arial"/>
-                        </a:defRPr>
-                      </a:pPr>
-                      <a:r>
-                        <a:t>-</a:t>
-                      </a:r>
-                    </a:p>
-                  </a:txBody>
-                  <a:tcPr/>
-                </a:tc>
-                <a:tc>
-                  <a:txBody>
-                    <a:bodyPr/>
-                    <a:lstStyle/>
-                    <a:p>
-                      <a:pPr>
-                        <a:defRPr sz="1100" b="0">
-                          <a:latin typeface="Arial"/>
-                        </a:defRPr>
-                      </a:pPr>
-                      <a:r>
-                        <a:t>-</a:t>
-                      </a:r>
-                    </a:p>
-                  </a:txBody>
-                  <a:tcPr/>
-                </a:tc>
-                <a:tc>
-                  <a:txBody>
-                    <a:bodyPr/>
-                    <a:lstStyle/>
-                    <a:p>
-                      <a:pPr>
-                        <a:defRPr sz="1100" b="0">
-                          <a:latin typeface="Arial"/>
-                        </a:defRPr>
-                      </a:pPr>
-                      <a:r>
-                        <a:t>&gt;90% reduction</a:t>
+                        <a:t>IL-15 promotes the production of a new s</a:t>
                       </a:r>
                     </a:p>
                   </a:txBody>
@@ -5000,7 +4930,7 @@
                 </a:solidFill>
                 <a:latin typeface="Arial"/>
               </a:rPr>
-              <a:t>Similarly, at 6 months, we observed a positive change in AAPS of 4.25 (&gt;90% SALT reduction) followed by 2.9 (50%-90%), 1.66 (10%-50%), and 1 (&lt;10%).</a:t>
+              <a:t>Moreover, cytokine-based therapeutic strategies utilizing IL-2 or IL-15 have the capacity to expand effector T cell and NK cells, thereby offering a viable alternative immunotherapeutic approach for cancer treatment.</a:t>
             </a:r>
           </a:p>
         </p:txBody>
@@ -5287,9 +5217,9 @@
                 <a:latin typeface="Arial"/>
               </a:rPr>
               <a:t>[출처]
-논문: Effectiveness and Safety Profile of Oral Tofacitinib in Alopecia Areata: An Observational Study from a Tertiary Hospital
-게재: Indian journal of dermatology
-원문: https://pubmed.ncbi.nlm.nih.gov/42708150/
+논문: IL-15 in alopecia areata: the immune tolerance mechanistic insights and translational perspectives
+게재: Frontiers in medicine
+원문: https://pubmed.ncbi.nlm.nih.gov/42707815/
 [이미지 출처]
 - Male pattern baldness.jpg / Originally uploaded by Lkinkade (Transferred by XenonX3) / CC BY-SA 2.5
   https://commons.wikimedia.org/wiki/File:Male_pattern_baldness.jpg
@@ -5299,8 +5229,8 @@
   동일조건변경허락(ShareAlike) 조항이 영상 전체에 적용될 수 있으니
   상업적 이용 시 해당 이미지를 교체하는 편이 안전합니다.
 [논문 본문 그림·표]
-- PubMed Central PMC13549691 (재사용 가능 라이선스)
-  https://www.ncbi.nlm.nih.gov/pmc/articles/PMC13549691/
+- PubMed Central PMC13548128 (재사용 가능 라이선스)
+  https://www.ncbi.nlm.nih.gov/pmc/articles/PMC13548128/
   · Table 1
   ※ 오픈액세스 논문의 그림·표이며, 위 원문 출처를 함께 표기하세요.
 </a:t>

--- a/data/2026-09-11/slides.pptx
+++ b/data/2026-09-11/slides.pptx
@@ -12,7 +12,6 @@
     <p:sldId id="260" r:id="rId12"/>
     <p:sldId id="261" r:id="rId13"/>
     <p:sldId id="262" r:id="rId14"/>
-    <p:sldId id="263" r:id="rId15"/>
   </p:sldIdLst>
   <p:sldSz cx="5559552" cy="9875520" type="screen4x3"/>
   <p:notesSz cx="6858000" cy="9144000"/>
@@ -594,7 +593,7 @@
           </a:p>
           <a:p>
             <a:r>
-              <a:t>대본: 《Frontiers in medicine》 - IL-15 in alopecia areata: the immune tolerance mechanistic insights and translational perspectives</a:t>
+              <a:t>대본: 《Recent advances in inflammation &amp; allergy drug discovery》 - Understanding Alopecia Areata: An Integrative Review of Causes, Mechanisms, and Management Strategies</a:t>
             </a:r>
           </a:p>
           <a:p>
@@ -674,7 +673,7 @@
           </a:p>
           <a:p>
             <a:r>
-              <a:t>대본: In the past, IL-2 and IL-15 are generally recognized for their roles in promoting pro-inflammatory immune responses.</a:t>
+              <a:t>대본: Introduction: Alopecia areata is a non-scarring autoimmune disease that is usually characterized by patchy or diffuse hair loss.</a:t>
             </a:r>
           </a:p>
           <a:p>
@@ -749,17 +748,17 @@
           <a:lstStyle/>
           <a:p>
             <a:r>
-              <a:t>[paper_table] 약 8초</a:t>
-            </a:r>
-          </a:p>
-          <a:p>
-            <a:r>
-              <a:t>대본: 표로 보면 이렇습니다. The comparison of IL-15 effect in different studies of AA.</a:t>
-            </a:r>
-          </a:p>
-          <a:p>
-            <a:r>
-              <a:t>연출 노트: 핵심 숫자 한 칸만 짚어준다. 표는 셀을 직접 수정할 수 있다.</a:t>
+              <a:t>[key_finding_2] 약 10초</a:t>
+            </a:r>
+          </a:p>
+          <a:p>
+            <a:r>
+              <a:t>대본: The collapse of the immunological privilege of hair follicles and activation of cytotoxic T-cell pathways, regulated by metabolic, psychological, and environmental variables, cause this disorder.</a:t>
+            </a:r>
+          </a:p>
+          <a:p>
+            <a:r>
+              <a:t>연출 노트: 핵심 포인트 2.</a:t>
             </a:r>
           </a:p>
         </p:txBody>
@@ -829,17 +828,17 @@
           <a:lstStyle/>
           <a:p>
             <a:r>
-              <a:t>[key_finding_2] 약 10초</a:t>
-            </a:r>
-          </a:p>
-          <a:p>
-            <a:r>
-              <a:t>대본: Moreover, cytokine-based therapeutic strategies utilizing IL-2 or IL-15 have the capacity to expand effector T cell and NK cells, thereby offering a viable alternative immunotherapeutic approach for cancer treatment.</a:t>
-            </a:r>
-          </a:p>
-          <a:p>
-            <a:r>
-              <a:t>연출 노트: 핵심 포인트 2.</a:t>
+              <a:t>[my_take] 약 10초</a:t>
+            </a:r>
+          </a:p>
+          <a:p>
+            <a:r>
+              <a:t>대본: 탈모 연구, 매일 쉽게 정리해드립니다 🙂</a:t>
+            </a:r>
+          </a:p>
+          <a:p>
+            <a:r>
+              <a:t>연출 노트: 본인 사진 + 코멘트. 문구를 직접 바꿔 쓰세요.</a:t>
             </a:r>
           </a:p>
         </p:txBody>
@@ -865,86 +864,6 @@
 </file>
 
 <file path=ppt/notesSlides/notesSlide6.xml><?xml version="1.0" encoding="utf-8"?>
-<p:notes xmlns:a="http://schemas.openxmlformats.org/drawingml/2006/main" xmlns:p="http://schemas.openxmlformats.org/presentationml/2006/main" xmlns:r="http://schemas.openxmlformats.org/officeDocument/2006/relationships">
-  <p:cSld>
-    <p:spTree>
-      <p:nvGrpSpPr>
-        <p:cNvPr id="1" name=""/>
-        <p:cNvGrpSpPr/>
-        <p:nvPr/>
-      </p:nvGrpSpPr>
-      <p:grpSpPr>
-        <a:xfrm>
-          <a:off x="0" y="0"/>
-          <a:ext cx="0" cy="0"/>
-          <a:chOff x="0" y="0"/>
-          <a:chExt cx="0" cy="0"/>
-        </a:xfrm>
-      </p:grpSpPr>
-      <p:sp>
-        <p:nvSpPr>
-          <p:cNvPr id="2" name="Slide Image Placeholder 1"/>
-          <p:cNvSpPr>
-            <a:spLocks noGrp="1"/>
-          </p:cNvSpPr>
-          <p:nvPr>
-            <p:ph type="sldImg" idx="2"/>
-          </p:nvPr>
-        </p:nvSpPr>
-        <p:spPr/>
-      </p:sp>
-      <p:sp>
-        <p:nvSpPr>
-          <p:cNvPr id="3" name="Notes Placeholder 2"/>
-          <p:cNvSpPr>
-            <a:spLocks noGrp="1"/>
-          </p:cNvSpPr>
-          <p:nvPr>
-            <p:ph type="body" idx="3" sz="quarter"/>
-          </p:nvPr>
-        </p:nvSpPr>
-        <p:spPr/>
-        <p:txBody>
-          <a:bodyPr/>
-          <a:lstStyle/>
-          <a:p>
-            <a:r>
-              <a:t>[my_take] 약 10초</a:t>
-            </a:r>
-          </a:p>
-          <a:p>
-            <a:r>
-              <a:t>대본: 탈모 연구, 매일 쉽게 정리해드립니다 🙂</a:t>
-            </a:r>
-          </a:p>
-          <a:p>
-            <a:r>
-              <a:t>연출 노트: 본인 사진 + 코멘트. 문구를 직접 바꿔 쓰세요.</a:t>
-            </a:r>
-          </a:p>
-        </p:txBody>
-      </p:sp>
-      <p:sp>
-        <p:nvSpPr>
-          <p:cNvPr id="4" name="Slide Number Placeholder 3"/>
-          <p:cNvSpPr>
-            <a:spLocks noGrp="1"/>
-          </p:cNvSpPr>
-          <p:nvPr>
-            <p:ph type="sldNum" idx="5" sz="quarter"/>
-          </p:nvPr>
-        </p:nvSpPr>
-        <p:spPr/>
-      </p:sp>
-    </p:spTree>
-  </p:cSld>
-  <p:clrMapOvr>
-    <a:masterClrMapping/>
-  </p:clrMapOvr>
-</p:notes>
-</file>
-
-<file path=ppt/notesSlides/notesSlide7.xml><?xml version="1.0" encoding="utf-8"?>
 <p:notes xmlns:a="http://schemas.openxmlformats.org/drawingml/2006/main" xmlns:p="http://schemas.openxmlformats.org/presentationml/2006/main" xmlns:r="http://schemas.openxmlformats.org/officeDocument/2006/relationships">
   <p:cSld>
     <p:spTree>
@@ -4043,7 +3962,7 @@
                 </a:solidFill>
                 <a:latin typeface="Arial"/>
               </a:rPr>
-              <a:t>FRONTIERS IN MEDICINE</a:t>
+              <a:t>RECENT ADVANCES IN INFLAMMATION &amp; ALLERG</a:t>
             </a:r>
           </a:p>
         </p:txBody>
@@ -4148,7 +4067,7 @@
                 </a:solidFill>
                 <a:latin typeface="Arial"/>
               </a:rPr>
-              <a:t>2026  |  매일 아침 탈모 연구 한 편</a:t>
+              <a:t>2026 Aug 28  |  매일 아침 탈모 연구 한 편</a:t>
             </a:r>
           </a:p>
         </p:txBody>
@@ -4233,7 +4152,7 @@
                 </a:solidFill>
                 <a:latin typeface="Arial"/>
               </a:rPr>
-              <a:t>IL-15 in alopecia areata: the immune tolerance mechanistic insights and translational perspectives</a:t>
+              <a:t>Understanding Alopecia Areata: An Integrative Review of Causes, Mechanisms, and Management Strategies</a:t>
             </a:r>
           </a:p>
         </p:txBody>
@@ -4268,7 +4187,7 @@
                 </a:solidFill>
                 <a:latin typeface="Arial"/>
               </a:rPr>
-              <a:t>Frontiers in medicine  ·  2026</a:t>
+              <a:t>Recent advances in inflammation &amp; allergy drug discovery  ·  2026 Aug 28</a:t>
             </a:r>
           </a:p>
         </p:txBody>
@@ -4397,7 +4316,7 @@
                 </a:solidFill>
                 <a:latin typeface="Arial"/>
               </a:rPr>
-              <a:t>In the past, IL-2 and IL-15 are generally recognized for their roles in promoting pro-inflammatory immune responses.</a:t>
+              <a:t>Introduction: Alopecia areata is a non-scarring autoimmune disease that is usually characterized by patchy or diffuse hair loss.</a:t>
             </a:r>
           </a:p>
         </p:txBody>
@@ -4411,410 +4330,6 @@
 </file>
 
 <file path=ppt/slides/slide4.xml><?xml version="1.0" encoding="utf-8"?>
-<p:sld xmlns:a="http://schemas.openxmlformats.org/drawingml/2006/main" xmlns:p="http://schemas.openxmlformats.org/presentationml/2006/main" xmlns:r="http://schemas.openxmlformats.org/officeDocument/2006/relationships">
-  <p:cSld>
-    <p:bg>
-      <p:bgPr>
-        <a:solidFill>
-          <a:srgbClr val="12142A"/>
-        </a:solidFill>
-        <a:effectLst/>
-      </p:bgPr>
-    </p:bg>
-    <p:spTree>
-      <p:nvGrpSpPr>
-        <p:cNvPr id="1" name=""/>
-        <p:cNvGrpSpPr/>
-        <p:nvPr/>
-      </p:nvGrpSpPr>
-      <p:grpSpPr/>
-      <p:sp>
-        <p:nvSpPr>
-          <p:cNvPr id="2" name="TextBox 1"/>
-          <p:cNvSpPr txBox="1"/>
-          <p:nvPr/>
-        </p:nvSpPr>
-        <p:spPr>
-          <a:xfrm>
-            <a:off x="365760" y="1097280"/>
-            <a:ext cx="4828032" cy="548640"/>
-          </a:xfrm>
-          <a:prstGeom prst="rect">
-            <a:avLst/>
-          </a:prstGeom>
-          <a:noFill/>
-        </p:spPr>
-        <p:txBody>
-          <a:bodyPr wrap="square" anchor="ctr">
-            <a:spAutoFit/>
-          </a:bodyPr>
-          <a:lstStyle/>
-          <a:p>
-            <a:pPr algn="ctr"/>
-            <a:r>
-              <a:rPr sz="2000" b="1">
-                <a:solidFill>
-                  <a:srgbClr val="FF6B6B"/>
-                </a:solidFill>
-                <a:latin typeface="Arial"/>
-              </a:rPr>
-              <a:t>논문 Table 1</a:t>
-            </a:r>
-          </a:p>
-        </p:txBody>
-      </p:sp>
-      <p:sp>
-        <p:nvSpPr>
-          <p:cNvPr id="3" name="TextBox 2"/>
-          <p:cNvSpPr txBox="1"/>
-          <p:nvPr/>
-        </p:nvSpPr>
-        <p:spPr>
-          <a:xfrm>
-            <a:off x="365760" y="1737360"/>
-            <a:ext cx="4828032" cy="914400"/>
-          </a:xfrm>
-          <a:prstGeom prst="rect">
-            <a:avLst/>
-          </a:prstGeom>
-          <a:noFill/>
-        </p:spPr>
-        <p:txBody>
-          <a:bodyPr wrap="square" anchor="ctr">
-            <a:spAutoFit/>
-          </a:bodyPr>
-          <a:lstStyle/>
-          <a:p>
-            <a:pPr algn="ctr"/>
-            <a:r>
-              <a:rPr sz="1300" b="0">
-                <a:solidFill>
-                  <a:srgbClr val="AAAFCD"/>
-                </a:solidFill>
-                <a:latin typeface="Arial"/>
-              </a:rPr>
-              <a:t>The comparison of IL-15 effect in different studies of AA.</a:t>
-            </a:r>
-          </a:p>
-        </p:txBody>
-      </p:sp>
-      <p:graphicFrame>
-        <p:nvGraphicFramePr>
-          <p:cNvPr id="4" name="Table 3"/>
-          <p:cNvGraphicFramePr>
-            <a:graphicFrameLocks noGrp="1"/>
-          </p:cNvGraphicFramePr>
-          <p:nvPr/>
-        </p:nvGraphicFramePr>
-        <p:xfrm>
-          <a:off x="320040" y="2926080"/>
-          <a:ext cx="4919472" cy="2011680"/>
-        </p:xfrm>
-        <a:graphic>
-          <a:graphicData uri="http://schemas.openxmlformats.org/drawingml/2006/table">
-            <a:tbl>
-              <a:tblPr firstRow="1" bandRow="1">
-                <a:tableStyleId>{5C22544A-7EE6-4342-B048-85BDC9FD1C3A}</a:tableStyleId>
-              </a:tblPr>
-              <a:tblGrid>
-                <a:gridCol w="1229868"/>
-                <a:gridCol w="1229868"/>
-                <a:gridCol w="1229868"/>
-                <a:gridCol w="1229868"/>
-              </a:tblGrid>
-              <a:tr h="502920">
-                <a:tc>
-                  <a:txBody>
-                    <a:bodyPr/>
-                    <a:lstStyle/>
-                    <a:p>
-                      <a:pPr>
-                        <a:defRPr sz="1200" b="1">
-                          <a:latin typeface="Arial"/>
-                        </a:defRPr>
-                      </a:pPr>
-                      <a:r>
-                        <a:t>Study</a:t>
-                      </a:r>
-                    </a:p>
-                  </a:txBody>
-                  <a:tcPr/>
-                </a:tc>
-                <a:tc>
-                  <a:txBody>
-                    <a:bodyPr/>
-                    <a:lstStyle/>
-                    <a:p>
-                      <a:pPr>
-                        <a:defRPr sz="1200" b="1">
-                          <a:latin typeface="Arial"/>
-                        </a:defRPr>
-                      </a:pPr>
-                      <a:r>
-                        <a:t>Model</a:t>
-                      </a:r>
-                    </a:p>
-                  </a:txBody>
-                  <a:tcPr/>
-                </a:tc>
-                <a:tc>
-                  <a:txBody>
-                    <a:bodyPr/>
-                    <a:lstStyle/>
-                    <a:p>
-                      <a:pPr>
-                        <a:defRPr sz="1200" b="1">
-                          <a:latin typeface="Arial"/>
-                        </a:defRPr>
-                      </a:pPr>
-                      <a:r>
-                        <a:t>IL-15 exposure</a:t>
-                      </a:r>
-                    </a:p>
-                  </a:txBody>
-                  <a:tcPr/>
-                </a:tc>
-                <a:tc>
-                  <a:txBody>
-                    <a:bodyPr/>
-                    <a:lstStyle/>
-                    <a:p>
-                      <a:pPr>
-                        <a:defRPr sz="1200" b="1">
-                          <a:latin typeface="Arial"/>
-                        </a:defRPr>
-                      </a:pPr>
-                      <a:r>
-                        <a:t>Main finding</a:t>
-                      </a:r>
-                    </a:p>
-                  </a:txBody>
-                  <a:tcPr/>
-                </a:tc>
-              </a:tr>
-              <a:tr h="502920">
-                <a:tc>
-                  <a:txBody>
-                    <a:bodyPr/>
-                    <a:lstStyle/>
-                    <a:p>
-                      <a:pPr>
-                        <a:defRPr sz="1100" b="0">
-                          <a:latin typeface="Arial"/>
-                        </a:defRPr>
-                      </a:pPr>
-                      <a:r>
-                        <a:t>Suzuki et al., 2024 (76)</a:t>
-                      </a:r>
-                    </a:p>
-                  </a:txBody>
-                  <a:tcPr/>
-                </a:tc>
-                <a:tc>
-                  <a:txBody>
-                    <a:bodyPr/>
-                    <a:lstStyle/>
-                    <a:p>
-                      <a:pPr>
-                        <a:defRPr sz="1100" b="0">
-                          <a:latin typeface="Arial"/>
-                        </a:defRPr>
-                      </a:pPr>
-                      <a:r>
-                        <a:t>Human AA tissue;ex vivo human hair folli</a:t>
-                      </a:r>
-                    </a:p>
-                  </a:txBody>
-                  <a:tcPr/>
-                </a:tc>
-                <a:tc>
-                  <a:txBody>
-                    <a:bodyPr/>
-                    <a:lstStyle/>
-                    <a:p>
-                      <a:pPr>
-                        <a:defRPr sz="1100" b="0">
-                          <a:latin typeface="Arial"/>
-                        </a:defRPr>
-                      </a:pPr>
-                      <a:r>
-                        <a:t>rhIL-15 exact concentration reported in </a:t>
-                      </a:r>
-                    </a:p>
-                  </a:txBody>
-                  <a:tcPr/>
-                </a:tc>
-                <a:tc>
-                  <a:txBody>
-                    <a:bodyPr/>
-                    <a:lstStyle/>
-                    <a:p>
-                      <a:pPr>
-                        <a:defRPr sz="1100" b="0">
-                          <a:latin typeface="Arial"/>
-                        </a:defRPr>
-                      </a:pPr>
-                      <a:r>
-                        <a:t>IL-15 exerts the anti-inflammatory effec</a:t>
-                      </a:r>
-                    </a:p>
-                  </a:txBody>
-                  <a:tcPr/>
-                </a:tc>
-              </a:tr>
-              <a:tr h="502920">
-                <a:tc>
-                  <a:txBody>
-                    <a:bodyPr/>
-                    <a:lstStyle/>
-                    <a:p>
-                      <a:pPr>
-                        <a:defRPr sz="1100" b="0">
-                          <a:latin typeface="Arial"/>
-                        </a:defRPr>
-                      </a:pPr>
-                      <a:r>
-                        <a:t>Suzuki et al., 2024 (82)</a:t>
-                      </a:r>
-                    </a:p>
-                  </a:txBody>
-                  <a:tcPr/>
-                </a:tc>
-                <a:tc>
-                  <a:txBody>
-                    <a:bodyPr/>
-                    <a:lstStyle/>
-                    <a:p>
-                      <a:pPr>
-                        <a:defRPr sz="1100" b="0">
-                          <a:latin typeface="Arial"/>
-                        </a:defRPr>
-                      </a:pPr>
-                      <a:r>
-                        <a:t>Human AA tissue</a:t>
-                      </a:r>
-                    </a:p>
-                  </a:txBody>
-                  <a:tcPr/>
-                </a:tc>
-                <a:tc>
-                  <a:txBody>
-                    <a:bodyPr/>
-                    <a:lstStyle/>
-                    <a:p>
-                      <a:pPr>
-                        <a:defRPr sz="1100" b="0">
-                          <a:latin typeface="Arial"/>
-                        </a:defRPr>
-                      </a:pPr>
-                      <a:r>
-                        <a:t>rhIL-15(1, 50 and 100 ng/ml)</a:t>
-                      </a:r>
-                    </a:p>
-                  </a:txBody>
-                  <a:tcPr/>
-                </a:tc>
-                <a:tc>
-                  <a:txBody>
-                    <a:bodyPr/>
-                    <a:lstStyle/>
-                    <a:p>
-                      <a:pPr>
-                        <a:defRPr sz="1100" b="0">
-                          <a:latin typeface="Arial"/>
-                        </a:defRPr>
-                      </a:pPr>
-                      <a:r>
-                        <a:t>IL-15 promotes hair follicles growth in </a:t>
-                      </a:r>
-                    </a:p>
-                  </a:txBody>
-                  <a:tcPr/>
-                </a:tc>
-              </a:tr>
-              <a:tr h="502920">
-                <a:tc>
-                  <a:txBody>
-                    <a:bodyPr/>
-                    <a:lstStyle/>
-                    <a:p>
-                      <a:pPr>
-                        <a:defRPr sz="1100" b="0">
-                          <a:latin typeface="Arial"/>
-                        </a:defRPr>
-                      </a:pPr>
-                      <a:r>
-                        <a:t>Seok et al., 2023 (75)</a:t>
-                      </a:r>
-                    </a:p>
-                  </a:txBody>
-                  <a:tcPr/>
-                </a:tc>
-                <a:tc>
-                  <a:txBody>
-                    <a:bodyPr/>
-                    <a:lstStyle/>
-                    <a:p>
-                      <a:pPr>
-                        <a:defRPr sz="1100" b="0">
-                          <a:latin typeface="Arial"/>
-                        </a:defRPr>
-                      </a:pPr>
-                      <a:r>
-                        <a:t>AA mouse model;cell culture</a:t>
-                      </a:r>
-                    </a:p>
-                  </a:txBody>
-                  <a:tcPr/>
-                </a:tc>
-                <a:tc>
-                  <a:txBody>
-                    <a:bodyPr/>
-                    <a:lstStyle/>
-                    <a:p>
-                      <a:pPr>
-                        <a:defRPr sz="1100" b="0">
-                          <a:latin typeface="Arial"/>
-                        </a:defRPr>
-                      </a:pPr>
-                      <a:r>
-                        <a:t>IL-15</a:t>
-                      </a:r>
-                    </a:p>
-                  </a:txBody>
-                  <a:tcPr/>
-                </a:tc>
-                <a:tc>
-                  <a:txBody>
-                    <a:bodyPr/>
-                    <a:lstStyle/>
-                    <a:p>
-                      <a:pPr>
-                        <a:defRPr sz="1100" b="0">
-                          <a:latin typeface="Arial"/>
-                        </a:defRPr>
-                      </a:pPr>
-                      <a:r>
-                        <a:t>IL-15 promotes the production of a new s</a:t>
-                      </a:r>
-                    </a:p>
-                  </a:txBody>
-                  <a:tcPr/>
-                </a:tc>
-              </a:tr>
-            </a:tbl>
-          </a:graphicData>
-        </a:graphic>
-      </p:graphicFrame>
-    </p:spTree>
-  </p:cSld>
-  <p:clrMapOvr>
-    <a:masterClrMapping/>
-  </p:clrMapOvr>
-</p:sld>
-</file>
-
-<file path=ppt/slides/slide5.xml><?xml version="1.0" encoding="utf-8"?>
 <p:sld xmlns:a="http://schemas.openxmlformats.org/drawingml/2006/main" xmlns:p="http://schemas.openxmlformats.org/presentationml/2006/main" xmlns:r="http://schemas.openxmlformats.org/officeDocument/2006/relationships">
   <p:cSld>
     <p:bg>
@@ -4930,7 +4445,7 @@
                 </a:solidFill>
                 <a:latin typeface="Arial"/>
               </a:rPr>
-              <a:t>Moreover, cytokine-based therapeutic strategies utilizing IL-2 or IL-15 have the capacity to expand effector T cell and NK cells, thereby offering a viable alternative immunotherapeutic approach for cancer treatment.</a:t>
+              <a:t>The collapse of the immunological privilege of hair follicles and activation of cytotoxic T-cell pathways, regulated by metabolic, psychological, and environmental variables, cause this disorder.</a:t>
             </a:r>
           </a:p>
         </p:txBody>
@@ -4943,7 +4458,7 @@
 </p:sld>
 </file>
 
-<file path=ppt/slides/slide6.xml><?xml version="1.0" encoding="utf-8"?>
+<file path=ppt/slides/slide5.xml><?xml version="1.0" encoding="utf-8"?>
 <p:sld xmlns:a="http://schemas.openxmlformats.org/drawingml/2006/main" xmlns:p="http://schemas.openxmlformats.org/presentationml/2006/main" xmlns:r="http://schemas.openxmlformats.org/officeDocument/2006/relationships">
   <p:cSld>
     <p:bg>
@@ -5072,7 +4587,7 @@
 </p:sld>
 </file>
 
-<file path=ppt/slides/slide7.xml><?xml version="1.0" encoding="utf-8"?>
+<file path=ppt/slides/slide6.xml><?xml version="1.0" encoding="utf-8"?>
 <p:sld xmlns:a="http://schemas.openxmlformats.org/drawingml/2006/main" xmlns:p="http://schemas.openxmlformats.org/presentationml/2006/main" xmlns:r="http://schemas.openxmlformats.org/officeDocument/2006/relationships">
   <p:cSld>
     <p:bg>
@@ -5133,7 +4648,7 @@
 </p:sld>
 </file>
 
-<file path=ppt/slides/slide8.xml><?xml version="1.0" encoding="utf-8"?>
+<file path=ppt/slides/slide7.xml><?xml version="1.0" encoding="utf-8"?>
 <p:sld xmlns:a="http://schemas.openxmlformats.org/drawingml/2006/main" xmlns:p="http://schemas.openxmlformats.org/presentationml/2006/main" xmlns:r="http://schemas.openxmlformats.org/officeDocument/2006/relationships">
   <p:cSld>
     <p:bg>
@@ -5217,9 +4732,9 @@
                 <a:latin typeface="Arial"/>
               </a:rPr>
               <a:t>[출처]
-논문: IL-15 in alopecia areata: the immune tolerance mechanistic insights and translational perspectives
-게재: Frontiers in medicine
-원문: https://pubmed.ncbi.nlm.nih.gov/42707815/
+논문: Understanding Alopecia Areata: An Integrative Review of Causes, Mechanisms, and Management Strategies
+게재: Recent advances in inflammation &amp; allergy drug discovery
+원문: https://pubmed.ncbi.nlm.nih.gov/42706968/
 [이미지 출처]
 - Male pattern baldness.jpg / Originally uploaded by Lkinkade (Transferred by XenonX3) / CC BY-SA 2.5
   https://commons.wikimedia.org/wiki/File:Male_pattern_baldness.jpg
@@ -5228,11 +4743,6 @@
 ※ CC BY-SA 이미지가 포함되어 있습니다. 저작자 표시가 필수이며,
   동일조건변경허락(ShareAlike) 조항이 영상 전체에 적용될 수 있으니
   상업적 이용 시 해당 이미지를 교체하는 편이 안전합니다.
-[논문 본문 그림·표]
-- PubMed Central PMC13548128 (재사용 가능 라이선스)
-  https://www.ncbi.nlm.nih.gov/pmc/articles/PMC13548128/
-  · Table 1
-  ※ 오픈액세스 논문의 그림·표이며, 위 원문 출처를 함께 표기하세요.
 </a:t>
             </a:r>
           </a:p>
